--- a/slides/EE5180_midterm_slides.pptx
+++ b/slides/EE5180_midterm_slides.pptx
@@ -3150,8 +3150,8 @@
         </p:nvSpPr>
         <p:spPr>
           <a:xfrm>
-            <a:off x="548640" y="2560320"/>
-            <a:ext cx="10515600" cy="822960"/>
+            <a:off x="548640" y="2514600"/>
+            <a:ext cx="10972800" cy="1051560"/>
           </a:xfrm>
           <a:prstGeom prst="rect">
             <a:avLst/>
@@ -3167,7 +3167,7 @@
               <a:buNone/>
             </a:pPr>
             <a:r>
-              <a:rPr lang="en-US" sz="1600" dirty="0">
+              <a:rPr lang="en-US" sz="1500" dirty="0">
                 <a:solidFill>
                   <a:srgbClr val="CADCFC"/>
                 </a:solidFill>
@@ -3175,9 +3175,9 @@
                 <a:ea typeface="Calibri" pitchFamily="34" charset="-122"/>
                 <a:cs typeface="Calibri" pitchFamily="34" charset="-120"/>
               </a:rPr>
-              <a:t>A twelve-word sentence and a fifty-word sentence are compressed into the same 2048 numbers before a single target word is emitted. That is the bottleneck — and it is why our BLEU falls away on long sentences.</a:t>
-            </a:r>
-            <a:endParaRPr lang="en-US" sz="1600" dirty="0"/>
+              <a:t>A twelve-word sentence and a fifty-word sentence are compressed into the same 2048 numbers before a single target word is emitted. That is the bottleneck. In our runs on Multi30k, reversed-model BLEU falls from 20.2 on 1-10-token sources to 7.9 on 21-30 — the paper, at full scale, reported no such degradation.</a:t>
+            </a:r>
+            <a:endParaRPr lang="en-US" sz="1500" dirty="0"/>
           </a:p>
         </p:txBody>
       </p:sp>

--- a/slides/EE5180_midterm_slides.pptx
+++ b/slides/EE5180_midterm_slides.pptx
@@ -6259,7 +6259,7 @@
                 <a:ea typeface="Calibri" pitchFamily="34" charset="-122"/>
                 <a:cs typeface="Calibri" pitchFamily="34" charset="-120"/>
               </a:rPr>
-              <a:t>Reversed (blue) sits below forward (red) at every epoch.</a:t>
+              <a:t>Reversed (blue) sits below forward (red) at every epoch, in all 3 seeds.</a:t>
             </a:r>
             <a:endParaRPr lang="en-US" sz="1050" dirty="0"/>
           </a:p>

--- a/slides/EE5180_midterm_slides.pptx
+++ b/slides/EE5180_midterm_slides.pptx
@@ -3175,7 +3175,7 @@
                 <a:ea typeface="Calibri" pitchFamily="34" charset="-122"/>
                 <a:cs typeface="Calibri" pitchFamily="34" charset="-120"/>
               </a:rPr>
-              <a:t>A twelve-word sentence and a fifty-word sentence are compressed into the same 2048 numbers before a single target word is emitted. That is the bottleneck. In our runs on Multi30k, reversed-model BLEU falls from 20.2 on 1-10-token sources to 7.9 on 21-30 — the paper, at full scale, reported no such degradation.</a:t>
+              <a:t>A twelve-word sentence and a fifty-word sentence are compressed into the same 2048 numbers before a single target word is emitted. That is the bottleneck. In our runs on ntst14, reversed-model BLEU falls from 9.5 on 1-10-token sources to 3.7 on 41-inf — the paper, at full scale, reported no such degradation.</a:t>
             </a:r>
             <a:endParaRPr lang="en-US" sz="1500" dirty="0"/>
           </a:p>
@@ -5682,16 +5682,2839 @@
           </a:p>
         </p:txBody>
       </p:sp>
-      <p:sp>
-        <p:nvSpPr>
-          <p:cNvPr id="4" name="Text 2"/>
+      <p:graphicFrame>
+        <p:nvGraphicFramePr>
+          <p:cNvPr id="8" name="Table 0"/>
+          <p:cNvGraphicFramePr>
+            <a:graphicFrameLocks noGrp="1"/>
+          </p:cNvGraphicFramePr>
+          <p:nvPr>
+            <p:extLst>
+              <p:ext uri="{D42A27DB-BD31-4B8C-83A1-F6EECF244321}">
+                <p14:modId xmlns:p14="http://schemas.microsoft.com/office/powerpoint/2010/main" val="1579011935"/>
+              </p:ext>
+            </p:extLst>
+          </p:nvPr>
+        </p:nvGraphicFramePr>
+        <p:xfrm>
+          <a:off x="548640" y="1554480"/>
+          <a:ext cx="11064240" cy="914400"/>
+        </p:xfrm>
+        <a:graphic>
+          <a:graphicData uri="http://schemas.openxmlformats.org/drawingml/2006/table">
+            <a:tbl>
+              <a:tblPr/>
+              <a:tblGrid>
+                <a:gridCol w="3657600"/>
+                <a:gridCol w="914400"/>
+                <a:gridCol w="1691640"/>
+                <a:gridCol w="1783080"/>
+                <a:gridCol w="1463040"/>
+                <a:gridCol w="1554480"/>
+              </a:tblGrid>
+              <a:tr h="301752">
+                <a:tc>
+                  <a:txBody>
+                    <a:bodyPr/>
+                    <a:lstStyle/>
+                    <a:p>
+                      <a:pPr algn="ctr" indent="0" marL="0">
+                        <a:buNone/>
+                      </a:pPr>
+                      <a:r>
+                        <a:rPr lang="en-US" sz="1250" b="1" dirty="0">
+                          <a:solidFill>
+                            <a:srgbClr val="FFFFFF"/>
+                          </a:solidFill>
+                          <a:latin typeface="Calibri" pitchFamily="34" charset="0"/>
+                          <a:ea typeface="Calibri" pitchFamily="34" charset="-122"/>
+                          <a:cs typeface="Calibri" pitchFamily="34" charset="-120"/>
+                        </a:rPr>
+                        <a:t>Model</a:t>
+                      </a:r>
+                      <a:endParaRPr lang="en-US" sz="1250" dirty="0">
+                        <a:latin typeface="Calibri" charset="0"/>
+                        <a:ea typeface="Calibri" charset="0"/>
+                        <a:cs typeface="Calibri" charset="0"/>
+                      </a:endParaRPr>
+                    </a:p>
+                  </a:txBody>
+                  <a:tcPr marL="91440" marR="91440" marT="45720" marB="45720" anchor="ctr">
+                    <a:lnL w="6350" cap="flat" cmpd="sng" algn="ctr">
+                      <a:solidFill>
+                        <a:srgbClr val="D6DBE8"/>
+                      </a:solidFill>
+                      <a:prstDash val="solid"/>
+                      <a:round/>
+                      <a:headEnd type="none" w="med" len="med"/>
+                      <a:tailEnd type="none" w="med" len="med"/>
+                    </a:lnL>
+                    <a:lnR w="6350" cap="flat" cmpd="sng" algn="ctr">
+                      <a:solidFill>
+                        <a:srgbClr val="D6DBE8"/>
+                      </a:solidFill>
+                      <a:prstDash val="solid"/>
+                      <a:round/>
+                      <a:headEnd type="none" w="med" len="med"/>
+                      <a:tailEnd type="none" w="med" len="med"/>
+                    </a:lnR>
+                    <a:lnT w="6350" cap="flat" cmpd="sng" algn="ctr">
+                      <a:solidFill>
+                        <a:srgbClr val="D6DBE8"/>
+                      </a:solidFill>
+                      <a:prstDash val="solid"/>
+                      <a:round/>
+                      <a:headEnd type="none" w="med" len="med"/>
+                      <a:tailEnd type="none" w="med" len="med"/>
+                    </a:lnT>
+                    <a:lnB w="6350" cap="flat" cmpd="sng" algn="ctr">
+                      <a:solidFill>
+                        <a:srgbClr val="D6DBE8"/>
+                      </a:solidFill>
+                      <a:prstDash val="solid"/>
+                      <a:round/>
+                      <a:headEnd type="none" w="med" len="med"/>
+                      <a:tailEnd type="none" w="med" len="med"/>
+                    </a:lnB>
+                    <a:solidFill>
+                      <a:srgbClr val="18204A"/>
+                    </a:solidFill>
+                  </a:tcPr>
+                </a:tc>
+                <a:tc>
+                  <a:txBody>
+                    <a:bodyPr/>
+                    <a:lstStyle/>
+                    <a:p>
+                      <a:pPr algn="ctr" indent="0" marL="0">
+                        <a:buNone/>
+                      </a:pPr>
+                      <a:r>
+                        <a:rPr lang="en-US" sz="1250" b="1" dirty="0">
+                          <a:solidFill>
+                            <a:srgbClr val="FFFFFF"/>
+                          </a:solidFill>
+                          <a:latin typeface="Calibri" pitchFamily="34" charset="0"/>
+                          <a:ea typeface="Calibri" pitchFamily="34" charset="-122"/>
+                          <a:cs typeface="Calibri" pitchFamily="34" charset="-120"/>
+                        </a:rPr>
+                        <a:t>beam</a:t>
+                      </a:r>
+                      <a:endParaRPr lang="en-US" sz="1250" dirty="0">
+                        <a:latin typeface="Calibri" charset="0"/>
+                        <a:ea typeface="Calibri" charset="0"/>
+                        <a:cs typeface="Calibri" charset="0"/>
+                      </a:endParaRPr>
+                    </a:p>
+                  </a:txBody>
+                  <a:tcPr marL="91440" marR="91440" marT="45720" marB="45720" anchor="ctr">
+                    <a:lnL w="6350" cap="flat" cmpd="sng" algn="ctr">
+                      <a:solidFill>
+                        <a:srgbClr val="D6DBE8"/>
+                      </a:solidFill>
+                      <a:prstDash val="solid"/>
+                      <a:round/>
+                      <a:headEnd type="none" w="med" len="med"/>
+                      <a:tailEnd type="none" w="med" len="med"/>
+                    </a:lnL>
+                    <a:lnR w="6350" cap="flat" cmpd="sng" algn="ctr">
+                      <a:solidFill>
+                        <a:srgbClr val="D6DBE8"/>
+                      </a:solidFill>
+                      <a:prstDash val="solid"/>
+                      <a:round/>
+                      <a:headEnd type="none" w="med" len="med"/>
+                      <a:tailEnd type="none" w="med" len="med"/>
+                    </a:lnR>
+                    <a:lnT w="6350" cap="flat" cmpd="sng" algn="ctr">
+                      <a:solidFill>
+                        <a:srgbClr val="D6DBE8"/>
+                      </a:solidFill>
+                      <a:prstDash val="solid"/>
+                      <a:round/>
+                      <a:headEnd type="none" w="med" len="med"/>
+                      <a:tailEnd type="none" w="med" len="med"/>
+                    </a:lnT>
+                    <a:lnB w="6350" cap="flat" cmpd="sng" algn="ctr">
+                      <a:solidFill>
+                        <a:srgbClr val="D6DBE8"/>
+                      </a:solidFill>
+                      <a:prstDash val="solid"/>
+                      <a:round/>
+                      <a:headEnd type="none" w="med" len="med"/>
+                      <a:tailEnd type="none" w="med" len="med"/>
+                    </a:lnB>
+                    <a:solidFill>
+                      <a:srgbClr val="18204A"/>
+                    </a:solidFill>
+                  </a:tcPr>
+                </a:tc>
+                <a:tc>
+                  <a:txBody>
+                    <a:bodyPr/>
+                    <a:lstStyle/>
+                    <a:p>
+                      <a:pPr algn="ctr" indent="0" marL="0">
+                        <a:buNone/>
+                      </a:pPr>
+                      <a:r>
+                        <a:rPr lang="en-US" sz="1250" b="1" dirty="0">
+                          <a:solidFill>
+                            <a:srgbClr val="FFFFFF"/>
+                          </a:solidFill>
+                          <a:latin typeface="Calibri" pitchFamily="34" charset="0"/>
+                          <a:ea typeface="Calibri" pitchFamily="34" charset="-122"/>
+                          <a:cs typeface="Calibri" pitchFamily="34" charset="-120"/>
+                        </a:rPr>
+                        <a:t>BLEU (tok)</a:t>
+                      </a:r>
+                      <a:endParaRPr lang="en-US" sz="1250" dirty="0">
+                        <a:latin typeface="Calibri" charset="0"/>
+                        <a:ea typeface="Calibri" charset="0"/>
+                        <a:cs typeface="Calibri" charset="0"/>
+                      </a:endParaRPr>
+                    </a:p>
+                  </a:txBody>
+                  <a:tcPr marL="91440" marR="91440" marT="45720" marB="45720" anchor="ctr">
+                    <a:lnL w="6350" cap="flat" cmpd="sng" algn="ctr">
+                      <a:solidFill>
+                        <a:srgbClr val="D6DBE8"/>
+                      </a:solidFill>
+                      <a:prstDash val="solid"/>
+                      <a:round/>
+                      <a:headEnd type="none" w="med" len="med"/>
+                      <a:tailEnd type="none" w="med" len="med"/>
+                    </a:lnL>
+                    <a:lnR w="6350" cap="flat" cmpd="sng" algn="ctr">
+                      <a:solidFill>
+                        <a:srgbClr val="D6DBE8"/>
+                      </a:solidFill>
+                      <a:prstDash val="solid"/>
+                      <a:round/>
+                      <a:headEnd type="none" w="med" len="med"/>
+                      <a:tailEnd type="none" w="med" len="med"/>
+                    </a:lnR>
+                    <a:lnT w="6350" cap="flat" cmpd="sng" algn="ctr">
+                      <a:solidFill>
+                        <a:srgbClr val="D6DBE8"/>
+                      </a:solidFill>
+                      <a:prstDash val="solid"/>
+                      <a:round/>
+                      <a:headEnd type="none" w="med" len="med"/>
+                      <a:tailEnd type="none" w="med" len="med"/>
+                    </a:lnT>
+                    <a:lnB w="6350" cap="flat" cmpd="sng" algn="ctr">
+                      <a:solidFill>
+                        <a:srgbClr val="D6DBE8"/>
+                      </a:solidFill>
+                      <a:prstDash val="solid"/>
+                      <a:round/>
+                      <a:headEnd type="none" w="med" len="med"/>
+                      <a:tailEnd type="none" w="med" len="med"/>
+                    </a:lnB>
+                    <a:solidFill>
+                      <a:srgbClr val="18204A"/>
+                    </a:solidFill>
+                  </a:tcPr>
+                </a:tc>
+                <a:tc>
+                  <a:txBody>
+                    <a:bodyPr/>
+                    <a:lstStyle/>
+                    <a:p>
+                      <a:pPr algn="ctr" indent="0" marL="0">
+                        <a:buNone/>
+                      </a:pPr>
+                      <a:r>
+                        <a:rPr lang="en-US" sz="1250" b="1" dirty="0">
+                          <a:solidFill>
+                            <a:srgbClr val="FFFFFF"/>
+                          </a:solidFill>
+                          <a:latin typeface="Calibri" pitchFamily="34" charset="0"/>
+                          <a:ea typeface="Calibri" pitchFamily="34" charset="-122"/>
+                          <a:cs typeface="Calibri" pitchFamily="34" charset="-120"/>
+                        </a:rPr>
+                        <a:t>BLEU (detok)</a:t>
+                      </a:r>
+                      <a:endParaRPr lang="en-US" sz="1250" dirty="0">
+                        <a:latin typeface="Calibri" charset="0"/>
+                        <a:ea typeface="Calibri" charset="0"/>
+                        <a:cs typeface="Calibri" charset="0"/>
+                      </a:endParaRPr>
+                    </a:p>
+                  </a:txBody>
+                  <a:tcPr marL="91440" marR="91440" marT="45720" marB="45720" anchor="ctr">
+                    <a:lnL w="6350" cap="flat" cmpd="sng" algn="ctr">
+                      <a:solidFill>
+                        <a:srgbClr val="D6DBE8"/>
+                      </a:solidFill>
+                      <a:prstDash val="solid"/>
+                      <a:round/>
+                      <a:headEnd type="none" w="med" len="med"/>
+                      <a:tailEnd type="none" w="med" len="med"/>
+                    </a:lnL>
+                    <a:lnR w="6350" cap="flat" cmpd="sng" algn="ctr">
+                      <a:solidFill>
+                        <a:srgbClr val="D6DBE8"/>
+                      </a:solidFill>
+                      <a:prstDash val="solid"/>
+                      <a:round/>
+                      <a:headEnd type="none" w="med" len="med"/>
+                      <a:tailEnd type="none" w="med" len="med"/>
+                    </a:lnR>
+                    <a:lnT w="6350" cap="flat" cmpd="sng" algn="ctr">
+                      <a:solidFill>
+                        <a:srgbClr val="D6DBE8"/>
+                      </a:solidFill>
+                      <a:prstDash val="solid"/>
+                      <a:round/>
+                      <a:headEnd type="none" w="med" len="med"/>
+                      <a:tailEnd type="none" w="med" len="med"/>
+                    </a:lnT>
+                    <a:lnB w="6350" cap="flat" cmpd="sng" algn="ctr">
+                      <a:solidFill>
+                        <a:srgbClr val="D6DBE8"/>
+                      </a:solidFill>
+                      <a:prstDash val="solid"/>
+                      <a:round/>
+                      <a:headEnd type="none" w="med" len="med"/>
+                      <a:tailEnd type="none" w="med" len="med"/>
+                    </a:lnB>
+                    <a:solidFill>
+                      <a:srgbClr val="18204A"/>
+                    </a:solidFill>
+                  </a:tcPr>
+                </a:tc>
+                <a:tc>
+                  <a:txBody>
+                    <a:bodyPr/>
+                    <a:lstStyle/>
+                    <a:p>
+                      <a:pPr algn="ctr" indent="0" marL="0">
+                        <a:buNone/>
+                      </a:pPr>
+                      <a:r>
+                        <a:rPr lang="en-US" sz="1250" b="1" dirty="0">
+                          <a:solidFill>
+                            <a:srgbClr val="FFFFFF"/>
+                          </a:solidFill>
+                          <a:latin typeface="Calibri" pitchFamily="34" charset="0"/>
+                          <a:ea typeface="Calibri" pitchFamily="34" charset="-122"/>
+                          <a:cs typeface="Calibri" pitchFamily="34" charset="-120"/>
+                        </a:rPr>
+                        <a:t>test ppl</a:t>
+                      </a:r>
+                      <a:endParaRPr lang="en-US" sz="1250" dirty="0">
+                        <a:latin typeface="Calibri" charset="0"/>
+                        <a:ea typeface="Calibri" charset="0"/>
+                        <a:cs typeface="Calibri" charset="0"/>
+                      </a:endParaRPr>
+                    </a:p>
+                  </a:txBody>
+                  <a:tcPr marL="91440" marR="91440" marT="45720" marB="45720" anchor="ctr">
+                    <a:lnL w="6350" cap="flat" cmpd="sng" algn="ctr">
+                      <a:solidFill>
+                        <a:srgbClr val="D6DBE8"/>
+                      </a:solidFill>
+                      <a:prstDash val="solid"/>
+                      <a:round/>
+                      <a:headEnd type="none" w="med" len="med"/>
+                      <a:tailEnd type="none" w="med" len="med"/>
+                    </a:lnL>
+                    <a:lnR w="6350" cap="flat" cmpd="sng" algn="ctr">
+                      <a:solidFill>
+                        <a:srgbClr val="D6DBE8"/>
+                      </a:solidFill>
+                      <a:prstDash val="solid"/>
+                      <a:round/>
+                      <a:headEnd type="none" w="med" len="med"/>
+                      <a:tailEnd type="none" w="med" len="med"/>
+                    </a:lnR>
+                    <a:lnT w="6350" cap="flat" cmpd="sng" algn="ctr">
+                      <a:solidFill>
+                        <a:srgbClr val="D6DBE8"/>
+                      </a:solidFill>
+                      <a:prstDash val="solid"/>
+                      <a:round/>
+                      <a:headEnd type="none" w="med" len="med"/>
+                      <a:tailEnd type="none" w="med" len="med"/>
+                    </a:lnT>
+                    <a:lnB w="6350" cap="flat" cmpd="sng" algn="ctr">
+                      <a:solidFill>
+                        <a:srgbClr val="D6DBE8"/>
+                      </a:solidFill>
+                      <a:prstDash val="solid"/>
+                      <a:round/>
+                      <a:headEnd type="none" w="med" len="med"/>
+                      <a:tailEnd type="none" w="med" len="med"/>
+                    </a:lnB>
+                    <a:solidFill>
+                      <a:srgbClr val="18204A"/>
+                    </a:solidFill>
+                  </a:tcPr>
+                </a:tc>
+                <a:tc>
+                  <a:txBody>
+                    <a:bodyPr/>
+                    <a:lstStyle/>
+                    <a:p>
+                      <a:pPr algn="ctr" indent="0" marL="0">
+                        <a:buNone/>
+                      </a:pPr>
+                      <a:r>
+                        <a:rPr lang="en-US" sz="1250" b="1" dirty="0">
+                          <a:solidFill>
+                            <a:srgbClr val="FFFFFF"/>
+                          </a:solidFill>
+                          <a:latin typeface="Calibri" pitchFamily="34" charset="0"/>
+                          <a:ea typeface="Calibri" pitchFamily="34" charset="-122"/>
+                          <a:cs typeface="Calibri" pitchFamily="34" charset="-120"/>
+                        </a:rPr>
+                        <a:t>paper</a:t>
+                      </a:r>
+                      <a:endParaRPr lang="en-US" sz="1250" dirty="0">
+                        <a:latin typeface="Calibri" charset="0"/>
+                        <a:ea typeface="Calibri" charset="0"/>
+                        <a:cs typeface="Calibri" charset="0"/>
+                      </a:endParaRPr>
+                    </a:p>
+                  </a:txBody>
+                  <a:tcPr marL="91440" marR="91440" marT="45720" marB="45720" anchor="ctr">
+                    <a:lnL w="6350" cap="flat" cmpd="sng" algn="ctr">
+                      <a:solidFill>
+                        <a:srgbClr val="D6DBE8"/>
+                      </a:solidFill>
+                      <a:prstDash val="solid"/>
+                      <a:round/>
+                      <a:headEnd type="none" w="med" len="med"/>
+                      <a:tailEnd type="none" w="med" len="med"/>
+                    </a:lnL>
+                    <a:lnR w="6350" cap="flat" cmpd="sng" algn="ctr">
+                      <a:solidFill>
+                        <a:srgbClr val="D6DBE8"/>
+                      </a:solidFill>
+                      <a:prstDash val="solid"/>
+                      <a:round/>
+                      <a:headEnd type="none" w="med" len="med"/>
+                      <a:tailEnd type="none" w="med" len="med"/>
+                    </a:lnR>
+                    <a:lnT w="6350" cap="flat" cmpd="sng" algn="ctr">
+                      <a:solidFill>
+                        <a:srgbClr val="D6DBE8"/>
+                      </a:solidFill>
+                      <a:prstDash val="solid"/>
+                      <a:round/>
+                      <a:headEnd type="none" w="med" len="med"/>
+                      <a:tailEnd type="none" w="med" len="med"/>
+                    </a:lnT>
+                    <a:lnB w="6350" cap="flat" cmpd="sng" algn="ctr">
+                      <a:solidFill>
+                        <a:srgbClr val="D6DBE8"/>
+                      </a:solidFill>
+                      <a:prstDash val="solid"/>
+                      <a:round/>
+                      <a:headEnd type="none" w="med" len="med"/>
+                      <a:tailEnd type="none" w="med" len="med"/>
+                    </a:lnB>
+                    <a:solidFill>
+                      <a:srgbClr val="18204A"/>
+                    </a:solidFill>
+                  </a:tcPr>
+                </a:tc>
+              </a:tr>
+              <a:tr h="301752">
+                <a:tc>
+                  <a:txBody>
+                    <a:bodyPr/>
+                    <a:lstStyle/>
+                    <a:p>
+                      <a:pPr algn="l" indent="0" marL="0">
+                        <a:buNone/>
+                      </a:pPr>
+                      <a:r>
+                        <a:rPr lang="en-US" sz="1250" dirty="0">
+                          <a:solidFill>
+                            <a:srgbClr val="C44E52"/>
+                          </a:solidFill>
+                          <a:latin typeface="Calibri" pitchFamily="34" charset="0"/>
+                          <a:ea typeface="Calibri" pitchFamily="34" charset="-122"/>
+                          <a:cs typeface="Calibri" pitchFamily="34" charset="-120"/>
+                        </a:rPr>
+                        <a:t>Single forward LSTM</a:t>
+                      </a:r>
+                      <a:endParaRPr lang="en-US" sz="1250" dirty="0">
+                        <a:latin typeface="Calibri" charset="0"/>
+                        <a:ea typeface="Calibri" charset="0"/>
+                        <a:cs typeface="Calibri" charset="0"/>
+                      </a:endParaRPr>
+                    </a:p>
+                  </a:txBody>
+                  <a:tcPr marL="91440" marR="91440" marT="45720" marB="45720" anchor="ctr">
+                    <a:lnL w="6350" cap="flat" cmpd="sng" algn="ctr">
+                      <a:solidFill>
+                        <a:srgbClr val="D6DBE8"/>
+                      </a:solidFill>
+                      <a:prstDash val="solid"/>
+                      <a:round/>
+                      <a:headEnd type="none" w="med" len="med"/>
+                      <a:tailEnd type="none" w="med" len="med"/>
+                    </a:lnL>
+                    <a:lnR w="6350" cap="flat" cmpd="sng" algn="ctr">
+                      <a:solidFill>
+                        <a:srgbClr val="D6DBE8"/>
+                      </a:solidFill>
+                      <a:prstDash val="solid"/>
+                      <a:round/>
+                      <a:headEnd type="none" w="med" len="med"/>
+                      <a:tailEnd type="none" w="med" len="med"/>
+                    </a:lnR>
+                    <a:lnT w="6350" cap="flat" cmpd="sng" algn="ctr">
+                      <a:solidFill>
+                        <a:srgbClr val="D6DBE8"/>
+                      </a:solidFill>
+                      <a:prstDash val="solid"/>
+                      <a:round/>
+                      <a:headEnd type="none" w="med" len="med"/>
+                      <a:tailEnd type="none" w="med" len="med"/>
+                    </a:lnT>
+                    <a:lnB w="6350" cap="flat" cmpd="sng" algn="ctr">
+                      <a:solidFill>
+                        <a:srgbClr val="D6DBE8"/>
+                      </a:solidFill>
+                      <a:prstDash val="solid"/>
+                      <a:round/>
+                      <a:headEnd type="none" w="med" len="med"/>
+                      <a:tailEnd type="none" w="med" len="med"/>
+                    </a:lnB>
+                  </a:tcPr>
+                </a:tc>
+                <a:tc>
+                  <a:txBody>
+                    <a:bodyPr/>
+                    <a:lstStyle/>
+                    <a:p>
+                      <a:pPr algn="ctr" indent="0" marL="0">
+                        <a:buNone/>
+                      </a:pPr>
+                      <a:r>
+                        <a:rPr lang="en-US" sz="1250" dirty="0">
+                          <a:solidFill>
+                            <a:srgbClr val="3B4A7A"/>
+                          </a:solidFill>
+                          <a:latin typeface="Calibri" pitchFamily="34" charset="0"/>
+                          <a:ea typeface="Calibri" pitchFamily="34" charset="-122"/>
+                          <a:cs typeface="Calibri" pitchFamily="34" charset="-120"/>
+                        </a:rPr>
+                        <a:t>1</a:t>
+                      </a:r>
+                      <a:endParaRPr lang="en-US" sz="1250" dirty="0">
+                        <a:latin typeface="Calibri" charset="0"/>
+                        <a:ea typeface="Calibri" charset="0"/>
+                        <a:cs typeface="Calibri" charset="0"/>
+                      </a:endParaRPr>
+                    </a:p>
+                  </a:txBody>
+                  <a:tcPr marL="91440" marR="91440" marT="45720" marB="45720" anchor="ctr">
+                    <a:lnL w="6350" cap="flat" cmpd="sng" algn="ctr">
+                      <a:solidFill>
+                        <a:srgbClr val="D6DBE8"/>
+                      </a:solidFill>
+                      <a:prstDash val="solid"/>
+                      <a:round/>
+                      <a:headEnd type="none" w="med" len="med"/>
+                      <a:tailEnd type="none" w="med" len="med"/>
+                    </a:lnL>
+                    <a:lnR w="6350" cap="flat" cmpd="sng" algn="ctr">
+                      <a:solidFill>
+                        <a:srgbClr val="D6DBE8"/>
+                      </a:solidFill>
+                      <a:prstDash val="solid"/>
+                      <a:round/>
+                      <a:headEnd type="none" w="med" len="med"/>
+                      <a:tailEnd type="none" w="med" len="med"/>
+                    </a:lnR>
+                    <a:lnT w="6350" cap="flat" cmpd="sng" algn="ctr">
+                      <a:solidFill>
+                        <a:srgbClr val="D6DBE8"/>
+                      </a:solidFill>
+                      <a:prstDash val="solid"/>
+                      <a:round/>
+                      <a:headEnd type="none" w="med" len="med"/>
+                      <a:tailEnd type="none" w="med" len="med"/>
+                    </a:lnT>
+                    <a:lnB w="6350" cap="flat" cmpd="sng" algn="ctr">
+                      <a:solidFill>
+                        <a:srgbClr val="D6DBE8"/>
+                      </a:solidFill>
+                      <a:prstDash val="solid"/>
+                      <a:round/>
+                      <a:headEnd type="none" w="med" len="med"/>
+                      <a:tailEnd type="none" w="med" len="med"/>
+                    </a:lnB>
+                  </a:tcPr>
+                </a:tc>
+                <a:tc>
+                  <a:txBody>
+                    <a:bodyPr/>
+                    <a:lstStyle/>
+                    <a:p>
+                      <a:pPr algn="ctr" indent="0" marL="0">
+                        <a:buNone/>
+                      </a:pPr>
+                      <a:r>
+                        <a:rPr lang="en-US" sz="1250" b="1" dirty="0">
+                          <a:solidFill>
+                            <a:srgbClr val="C44E52"/>
+                          </a:solidFill>
+                          <a:latin typeface="Calibri" pitchFamily="34" charset="0"/>
+                          <a:ea typeface="Calibri" pitchFamily="34" charset="-122"/>
+                          <a:cs typeface="Calibri" pitchFamily="34" charset="-120"/>
+                        </a:rPr>
+                        <a:t>4.05</a:t>
+                      </a:r>
+                      <a:endParaRPr lang="en-US" sz="1250" dirty="0">
+                        <a:latin typeface="Calibri" charset="0"/>
+                        <a:ea typeface="Calibri" charset="0"/>
+                        <a:cs typeface="Calibri" charset="0"/>
+                      </a:endParaRPr>
+                    </a:p>
+                  </a:txBody>
+                  <a:tcPr marL="91440" marR="91440" marT="45720" marB="45720" anchor="ctr">
+                    <a:lnL w="6350" cap="flat" cmpd="sng" algn="ctr">
+                      <a:solidFill>
+                        <a:srgbClr val="D6DBE8"/>
+                      </a:solidFill>
+                      <a:prstDash val="solid"/>
+                      <a:round/>
+                      <a:headEnd type="none" w="med" len="med"/>
+                      <a:tailEnd type="none" w="med" len="med"/>
+                    </a:lnL>
+                    <a:lnR w="6350" cap="flat" cmpd="sng" algn="ctr">
+                      <a:solidFill>
+                        <a:srgbClr val="D6DBE8"/>
+                      </a:solidFill>
+                      <a:prstDash val="solid"/>
+                      <a:round/>
+                      <a:headEnd type="none" w="med" len="med"/>
+                      <a:tailEnd type="none" w="med" len="med"/>
+                    </a:lnR>
+                    <a:lnT w="6350" cap="flat" cmpd="sng" algn="ctr">
+                      <a:solidFill>
+                        <a:srgbClr val="D6DBE8"/>
+                      </a:solidFill>
+                      <a:prstDash val="solid"/>
+                      <a:round/>
+                      <a:headEnd type="none" w="med" len="med"/>
+                      <a:tailEnd type="none" w="med" len="med"/>
+                    </a:lnT>
+                    <a:lnB w="6350" cap="flat" cmpd="sng" algn="ctr">
+                      <a:solidFill>
+                        <a:srgbClr val="D6DBE8"/>
+                      </a:solidFill>
+                      <a:prstDash val="solid"/>
+                      <a:round/>
+                      <a:headEnd type="none" w="med" len="med"/>
+                      <a:tailEnd type="none" w="med" len="med"/>
+                    </a:lnB>
+                  </a:tcPr>
+                </a:tc>
+                <a:tc>
+                  <a:txBody>
+                    <a:bodyPr/>
+                    <a:lstStyle/>
+                    <a:p>
+                      <a:pPr algn="ctr" indent="0" marL="0">
+                        <a:buNone/>
+                      </a:pPr>
+                      <a:r>
+                        <a:rPr lang="en-US" sz="1250" dirty="0">
+                          <a:solidFill>
+                            <a:srgbClr val="3B4A7A"/>
+                          </a:solidFill>
+                          <a:latin typeface="Calibri" pitchFamily="34" charset="0"/>
+                          <a:ea typeface="Calibri" pitchFamily="34" charset="-122"/>
+                          <a:cs typeface="Calibri" pitchFamily="34" charset="-120"/>
+                        </a:rPr>
+                        <a:t>2.68</a:t>
+                      </a:r>
+                      <a:endParaRPr lang="en-US" sz="1250" dirty="0">
+                        <a:latin typeface="Calibri" charset="0"/>
+                        <a:ea typeface="Calibri" charset="0"/>
+                        <a:cs typeface="Calibri" charset="0"/>
+                      </a:endParaRPr>
+                    </a:p>
+                  </a:txBody>
+                  <a:tcPr marL="91440" marR="91440" marT="45720" marB="45720" anchor="ctr">
+                    <a:lnL w="6350" cap="flat" cmpd="sng" algn="ctr">
+                      <a:solidFill>
+                        <a:srgbClr val="D6DBE8"/>
+                      </a:solidFill>
+                      <a:prstDash val="solid"/>
+                      <a:round/>
+                      <a:headEnd type="none" w="med" len="med"/>
+                      <a:tailEnd type="none" w="med" len="med"/>
+                    </a:lnL>
+                    <a:lnR w="6350" cap="flat" cmpd="sng" algn="ctr">
+                      <a:solidFill>
+                        <a:srgbClr val="D6DBE8"/>
+                      </a:solidFill>
+                      <a:prstDash val="solid"/>
+                      <a:round/>
+                      <a:headEnd type="none" w="med" len="med"/>
+                      <a:tailEnd type="none" w="med" len="med"/>
+                    </a:lnR>
+                    <a:lnT w="6350" cap="flat" cmpd="sng" algn="ctr">
+                      <a:solidFill>
+                        <a:srgbClr val="D6DBE8"/>
+                      </a:solidFill>
+                      <a:prstDash val="solid"/>
+                      <a:round/>
+                      <a:headEnd type="none" w="med" len="med"/>
+                      <a:tailEnd type="none" w="med" len="med"/>
+                    </a:lnT>
+                    <a:lnB w="6350" cap="flat" cmpd="sng" algn="ctr">
+                      <a:solidFill>
+                        <a:srgbClr val="D6DBE8"/>
+                      </a:solidFill>
+                      <a:prstDash val="solid"/>
+                      <a:round/>
+                      <a:headEnd type="none" w="med" len="med"/>
+                      <a:tailEnd type="none" w="med" len="med"/>
+                    </a:lnB>
+                  </a:tcPr>
+                </a:tc>
+                <a:tc>
+                  <a:txBody>
+                    <a:bodyPr/>
+                    <a:lstStyle/>
+                    <a:p>
+                      <a:pPr algn="ctr" indent="0" marL="0">
+                        <a:buNone/>
+                      </a:pPr>
+                      <a:r>
+                        <a:rPr lang="en-US" sz="1250" dirty="0">
+                          <a:solidFill>
+                            <a:srgbClr val="3B4A7A"/>
+                          </a:solidFill>
+                          <a:latin typeface="Calibri" pitchFamily="34" charset="0"/>
+                          <a:ea typeface="Calibri" pitchFamily="34" charset="-122"/>
+                          <a:cs typeface="Calibri" pitchFamily="34" charset="-120"/>
+                        </a:rPr>
+                        <a:t>32.89</a:t>
+                      </a:r>
+                      <a:endParaRPr lang="en-US" sz="1250" dirty="0">
+                        <a:latin typeface="Calibri" charset="0"/>
+                        <a:ea typeface="Calibri" charset="0"/>
+                        <a:cs typeface="Calibri" charset="0"/>
+                      </a:endParaRPr>
+                    </a:p>
+                  </a:txBody>
+                  <a:tcPr marL="91440" marR="91440" marT="45720" marB="45720" anchor="ctr">
+                    <a:lnL w="6350" cap="flat" cmpd="sng" algn="ctr">
+                      <a:solidFill>
+                        <a:srgbClr val="D6DBE8"/>
+                      </a:solidFill>
+                      <a:prstDash val="solid"/>
+                      <a:round/>
+                      <a:headEnd type="none" w="med" len="med"/>
+                      <a:tailEnd type="none" w="med" len="med"/>
+                    </a:lnL>
+                    <a:lnR w="6350" cap="flat" cmpd="sng" algn="ctr">
+                      <a:solidFill>
+                        <a:srgbClr val="D6DBE8"/>
+                      </a:solidFill>
+                      <a:prstDash val="solid"/>
+                      <a:round/>
+                      <a:headEnd type="none" w="med" len="med"/>
+                      <a:tailEnd type="none" w="med" len="med"/>
+                    </a:lnR>
+                    <a:lnT w="6350" cap="flat" cmpd="sng" algn="ctr">
+                      <a:solidFill>
+                        <a:srgbClr val="D6DBE8"/>
+                      </a:solidFill>
+                      <a:prstDash val="solid"/>
+                      <a:round/>
+                      <a:headEnd type="none" w="med" len="med"/>
+                      <a:tailEnd type="none" w="med" len="med"/>
+                    </a:lnT>
+                    <a:lnB w="6350" cap="flat" cmpd="sng" algn="ctr">
+                      <a:solidFill>
+                        <a:srgbClr val="D6DBE8"/>
+                      </a:solidFill>
+                      <a:prstDash val="solid"/>
+                      <a:round/>
+                      <a:headEnd type="none" w="med" len="med"/>
+                      <a:tailEnd type="none" w="med" len="med"/>
+                    </a:lnB>
+                  </a:tcPr>
+                </a:tc>
+                <a:tc>
+                  <a:txBody>
+                    <a:bodyPr/>
+                    <a:lstStyle/>
+                    <a:p>
+                      <a:pPr algn="ctr" indent="0" marL="0">
+                        <a:buNone/>
+                      </a:pPr>
+                      <a:r>
+                        <a:rPr lang="en-US" sz="1250" dirty="0">
+                          <a:solidFill>
+                            <a:srgbClr val="6B7280"/>
+                          </a:solidFill>
+                          <a:latin typeface="Calibri" pitchFamily="34" charset="0"/>
+                          <a:ea typeface="Calibri" pitchFamily="34" charset="-122"/>
+                          <a:cs typeface="Calibri" pitchFamily="34" charset="-120"/>
+                        </a:rPr>
+                        <a:t>—</a:t>
+                      </a:r>
+                      <a:endParaRPr lang="en-US" sz="1250" dirty="0">
+                        <a:latin typeface="Calibri" charset="0"/>
+                        <a:ea typeface="Calibri" charset="0"/>
+                        <a:cs typeface="Calibri" charset="0"/>
+                      </a:endParaRPr>
+                    </a:p>
+                  </a:txBody>
+                  <a:tcPr marL="91440" marR="91440" marT="45720" marB="45720" anchor="ctr">
+                    <a:lnL w="6350" cap="flat" cmpd="sng" algn="ctr">
+                      <a:solidFill>
+                        <a:srgbClr val="D6DBE8"/>
+                      </a:solidFill>
+                      <a:prstDash val="solid"/>
+                      <a:round/>
+                      <a:headEnd type="none" w="med" len="med"/>
+                      <a:tailEnd type="none" w="med" len="med"/>
+                    </a:lnL>
+                    <a:lnR w="6350" cap="flat" cmpd="sng" algn="ctr">
+                      <a:solidFill>
+                        <a:srgbClr val="D6DBE8"/>
+                      </a:solidFill>
+                      <a:prstDash val="solid"/>
+                      <a:round/>
+                      <a:headEnd type="none" w="med" len="med"/>
+                      <a:tailEnd type="none" w="med" len="med"/>
+                    </a:lnR>
+                    <a:lnT w="6350" cap="flat" cmpd="sng" algn="ctr">
+                      <a:solidFill>
+                        <a:srgbClr val="D6DBE8"/>
+                      </a:solidFill>
+                      <a:prstDash val="solid"/>
+                      <a:round/>
+                      <a:headEnd type="none" w="med" len="med"/>
+                      <a:tailEnd type="none" w="med" len="med"/>
+                    </a:lnT>
+                    <a:lnB w="6350" cap="flat" cmpd="sng" algn="ctr">
+                      <a:solidFill>
+                        <a:srgbClr val="D6DBE8"/>
+                      </a:solidFill>
+                      <a:prstDash val="solid"/>
+                      <a:round/>
+                      <a:headEnd type="none" w="med" len="med"/>
+                      <a:tailEnd type="none" w="med" len="med"/>
+                    </a:lnB>
+                  </a:tcPr>
+                </a:tc>
+              </a:tr>
+              <a:tr h="301752">
+                <a:tc>
+                  <a:txBody>
+                    <a:bodyPr/>
+                    <a:lstStyle/>
+                    <a:p>
+                      <a:pPr algn="l" indent="0" marL="0">
+                        <a:buNone/>
+                      </a:pPr>
+                      <a:r>
+                        <a:rPr lang="en-US" sz="1250" dirty="0">
+                          <a:solidFill>
+                            <a:srgbClr val="C44E52"/>
+                          </a:solidFill>
+                          <a:latin typeface="Calibri" pitchFamily="34" charset="0"/>
+                          <a:ea typeface="Calibri" pitchFamily="34" charset="-122"/>
+                          <a:cs typeface="Calibri" pitchFamily="34" charset="-120"/>
+                        </a:rPr>
+                        <a:t>Single forward LSTM</a:t>
+                      </a:r>
+                      <a:endParaRPr lang="en-US" sz="1250" dirty="0">
+                        <a:latin typeface="Calibri" charset="0"/>
+                        <a:ea typeface="Calibri" charset="0"/>
+                        <a:cs typeface="Calibri" charset="0"/>
+                      </a:endParaRPr>
+                    </a:p>
+                  </a:txBody>
+                  <a:tcPr marL="91440" marR="91440" marT="45720" marB="45720" anchor="ctr">
+                    <a:lnL w="6350" cap="flat" cmpd="sng" algn="ctr">
+                      <a:solidFill>
+                        <a:srgbClr val="D6DBE8"/>
+                      </a:solidFill>
+                      <a:prstDash val="solid"/>
+                      <a:round/>
+                      <a:headEnd type="none" w="med" len="med"/>
+                      <a:tailEnd type="none" w="med" len="med"/>
+                    </a:lnL>
+                    <a:lnR w="6350" cap="flat" cmpd="sng" algn="ctr">
+                      <a:solidFill>
+                        <a:srgbClr val="D6DBE8"/>
+                      </a:solidFill>
+                      <a:prstDash val="solid"/>
+                      <a:round/>
+                      <a:headEnd type="none" w="med" len="med"/>
+                      <a:tailEnd type="none" w="med" len="med"/>
+                    </a:lnR>
+                    <a:lnT w="6350" cap="flat" cmpd="sng" algn="ctr">
+                      <a:solidFill>
+                        <a:srgbClr val="D6DBE8"/>
+                      </a:solidFill>
+                      <a:prstDash val="solid"/>
+                      <a:round/>
+                      <a:headEnd type="none" w="med" len="med"/>
+                      <a:tailEnd type="none" w="med" len="med"/>
+                    </a:lnT>
+                    <a:lnB w="6350" cap="flat" cmpd="sng" algn="ctr">
+                      <a:solidFill>
+                        <a:srgbClr val="D6DBE8"/>
+                      </a:solidFill>
+                      <a:prstDash val="solid"/>
+                      <a:round/>
+                      <a:headEnd type="none" w="med" len="med"/>
+                      <a:tailEnd type="none" w="med" len="med"/>
+                    </a:lnB>
+                  </a:tcPr>
+                </a:tc>
+                <a:tc>
+                  <a:txBody>
+                    <a:bodyPr/>
+                    <a:lstStyle/>
+                    <a:p>
+                      <a:pPr algn="ctr" indent="0" marL="0">
+                        <a:buNone/>
+                      </a:pPr>
+                      <a:r>
+                        <a:rPr lang="en-US" sz="1250" dirty="0">
+                          <a:solidFill>
+                            <a:srgbClr val="3B4A7A"/>
+                          </a:solidFill>
+                          <a:latin typeface="Calibri" pitchFamily="34" charset="0"/>
+                          <a:ea typeface="Calibri" pitchFamily="34" charset="-122"/>
+                          <a:cs typeface="Calibri" pitchFamily="34" charset="-120"/>
+                        </a:rPr>
+                        <a:t>2</a:t>
+                      </a:r>
+                      <a:endParaRPr lang="en-US" sz="1250" dirty="0">
+                        <a:latin typeface="Calibri" charset="0"/>
+                        <a:ea typeface="Calibri" charset="0"/>
+                        <a:cs typeface="Calibri" charset="0"/>
+                      </a:endParaRPr>
+                    </a:p>
+                  </a:txBody>
+                  <a:tcPr marL="91440" marR="91440" marT="45720" marB="45720" anchor="ctr">
+                    <a:lnL w="6350" cap="flat" cmpd="sng" algn="ctr">
+                      <a:solidFill>
+                        <a:srgbClr val="D6DBE8"/>
+                      </a:solidFill>
+                      <a:prstDash val="solid"/>
+                      <a:round/>
+                      <a:headEnd type="none" w="med" len="med"/>
+                      <a:tailEnd type="none" w="med" len="med"/>
+                    </a:lnL>
+                    <a:lnR w="6350" cap="flat" cmpd="sng" algn="ctr">
+                      <a:solidFill>
+                        <a:srgbClr val="D6DBE8"/>
+                      </a:solidFill>
+                      <a:prstDash val="solid"/>
+                      <a:round/>
+                      <a:headEnd type="none" w="med" len="med"/>
+                      <a:tailEnd type="none" w="med" len="med"/>
+                    </a:lnR>
+                    <a:lnT w="6350" cap="flat" cmpd="sng" algn="ctr">
+                      <a:solidFill>
+                        <a:srgbClr val="D6DBE8"/>
+                      </a:solidFill>
+                      <a:prstDash val="solid"/>
+                      <a:round/>
+                      <a:headEnd type="none" w="med" len="med"/>
+                      <a:tailEnd type="none" w="med" len="med"/>
+                    </a:lnT>
+                    <a:lnB w="6350" cap="flat" cmpd="sng" algn="ctr">
+                      <a:solidFill>
+                        <a:srgbClr val="D6DBE8"/>
+                      </a:solidFill>
+                      <a:prstDash val="solid"/>
+                      <a:round/>
+                      <a:headEnd type="none" w="med" len="med"/>
+                      <a:tailEnd type="none" w="med" len="med"/>
+                    </a:lnB>
+                  </a:tcPr>
+                </a:tc>
+                <a:tc>
+                  <a:txBody>
+                    <a:bodyPr/>
+                    <a:lstStyle/>
+                    <a:p>
+                      <a:pPr algn="ctr" indent="0" marL="0">
+                        <a:buNone/>
+                      </a:pPr>
+                      <a:r>
+                        <a:rPr lang="en-US" sz="1250" b="1" dirty="0">
+                          <a:solidFill>
+                            <a:srgbClr val="C44E52"/>
+                          </a:solidFill>
+                          <a:latin typeface="Calibri" pitchFamily="34" charset="0"/>
+                          <a:ea typeface="Calibri" pitchFamily="34" charset="-122"/>
+                          <a:cs typeface="Calibri" pitchFamily="34" charset="-120"/>
+                        </a:rPr>
+                        <a:t>4.24</a:t>
+                      </a:r>
+                      <a:endParaRPr lang="en-US" sz="1250" dirty="0">
+                        <a:latin typeface="Calibri" charset="0"/>
+                        <a:ea typeface="Calibri" charset="0"/>
+                        <a:cs typeface="Calibri" charset="0"/>
+                      </a:endParaRPr>
+                    </a:p>
+                  </a:txBody>
+                  <a:tcPr marL="91440" marR="91440" marT="45720" marB="45720" anchor="ctr">
+                    <a:lnL w="6350" cap="flat" cmpd="sng" algn="ctr">
+                      <a:solidFill>
+                        <a:srgbClr val="D6DBE8"/>
+                      </a:solidFill>
+                      <a:prstDash val="solid"/>
+                      <a:round/>
+                      <a:headEnd type="none" w="med" len="med"/>
+                      <a:tailEnd type="none" w="med" len="med"/>
+                    </a:lnL>
+                    <a:lnR w="6350" cap="flat" cmpd="sng" algn="ctr">
+                      <a:solidFill>
+                        <a:srgbClr val="D6DBE8"/>
+                      </a:solidFill>
+                      <a:prstDash val="solid"/>
+                      <a:round/>
+                      <a:headEnd type="none" w="med" len="med"/>
+                      <a:tailEnd type="none" w="med" len="med"/>
+                    </a:lnR>
+                    <a:lnT w="6350" cap="flat" cmpd="sng" algn="ctr">
+                      <a:solidFill>
+                        <a:srgbClr val="D6DBE8"/>
+                      </a:solidFill>
+                      <a:prstDash val="solid"/>
+                      <a:round/>
+                      <a:headEnd type="none" w="med" len="med"/>
+                      <a:tailEnd type="none" w="med" len="med"/>
+                    </a:lnT>
+                    <a:lnB w="6350" cap="flat" cmpd="sng" algn="ctr">
+                      <a:solidFill>
+                        <a:srgbClr val="D6DBE8"/>
+                      </a:solidFill>
+                      <a:prstDash val="solid"/>
+                      <a:round/>
+                      <a:headEnd type="none" w="med" len="med"/>
+                      <a:tailEnd type="none" w="med" len="med"/>
+                    </a:lnB>
+                  </a:tcPr>
+                </a:tc>
+                <a:tc>
+                  <a:txBody>
+                    <a:bodyPr/>
+                    <a:lstStyle/>
+                    <a:p>
+                      <a:pPr algn="ctr" indent="0" marL="0">
+                        <a:buNone/>
+                      </a:pPr>
+                      <a:r>
+                        <a:rPr lang="en-US" sz="1250" dirty="0">
+                          <a:solidFill>
+                            <a:srgbClr val="3B4A7A"/>
+                          </a:solidFill>
+                          <a:latin typeface="Calibri" pitchFamily="34" charset="0"/>
+                          <a:ea typeface="Calibri" pitchFamily="34" charset="-122"/>
+                          <a:cs typeface="Calibri" pitchFamily="34" charset="-120"/>
+                        </a:rPr>
+                        <a:t>2.86</a:t>
+                      </a:r>
+                      <a:endParaRPr lang="en-US" sz="1250" dirty="0">
+                        <a:latin typeface="Calibri" charset="0"/>
+                        <a:ea typeface="Calibri" charset="0"/>
+                        <a:cs typeface="Calibri" charset="0"/>
+                      </a:endParaRPr>
+                    </a:p>
+                  </a:txBody>
+                  <a:tcPr marL="91440" marR="91440" marT="45720" marB="45720" anchor="ctr">
+                    <a:lnL w="6350" cap="flat" cmpd="sng" algn="ctr">
+                      <a:solidFill>
+                        <a:srgbClr val="D6DBE8"/>
+                      </a:solidFill>
+                      <a:prstDash val="solid"/>
+                      <a:round/>
+                      <a:headEnd type="none" w="med" len="med"/>
+                      <a:tailEnd type="none" w="med" len="med"/>
+                    </a:lnL>
+                    <a:lnR w="6350" cap="flat" cmpd="sng" algn="ctr">
+                      <a:solidFill>
+                        <a:srgbClr val="D6DBE8"/>
+                      </a:solidFill>
+                      <a:prstDash val="solid"/>
+                      <a:round/>
+                      <a:headEnd type="none" w="med" len="med"/>
+                      <a:tailEnd type="none" w="med" len="med"/>
+                    </a:lnR>
+                    <a:lnT w="6350" cap="flat" cmpd="sng" algn="ctr">
+                      <a:solidFill>
+                        <a:srgbClr val="D6DBE8"/>
+                      </a:solidFill>
+                      <a:prstDash val="solid"/>
+                      <a:round/>
+                      <a:headEnd type="none" w="med" len="med"/>
+                      <a:tailEnd type="none" w="med" len="med"/>
+                    </a:lnT>
+                    <a:lnB w="6350" cap="flat" cmpd="sng" algn="ctr">
+                      <a:solidFill>
+                        <a:srgbClr val="D6DBE8"/>
+                      </a:solidFill>
+                      <a:prstDash val="solid"/>
+                      <a:round/>
+                      <a:headEnd type="none" w="med" len="med"/>
+                      <a:tailEnd type="none" w="med" len="med"/>
+                    </a:lnB>
+                  </a:tcPr>
+                </a:tc>
+                <a:tc>
+                  <a:txBody>
+                    <a:bodyPr/>
+                    <a:lstStyle/>
+                    <a:p>
+                      <a:pPr algn="ctr" indent="0" marL="0">
+                        <a:buNone/>
+                      </a:pPr>
+                      <a:r>
+                        <a:rPr lang="en-US" sz="1250" dirty="0">
+                          <a:solidFill>
+                            <a:srgbClr val="3B4A7A"/>
+                          </a:solidFill>
+                          <a:latin typeface="Calibri" pitchFamily="34" charset="0"/>
+                          <a:ea typeface="Calibri" pitchFamily="34" charset="-122"/>
+                          <a:cs typeface="Calibri" pitchFamily="34" charset="-120"/>
+                        </a:rPr>
+                        <a:t>32.89</a:t>
+                      </a:r>
+                      <a:endParaRPr lang="en-US" sz="1250" dirty="0">
+                        <a:latin typeface="Calibri" charset="0"/>
+                        <a:ea typeface="Calibri" charset="0"/>
+                        <a:cs typeface="Calibri" charset="0"/>
+                      </a:endParaRPr>
+                    </a:p>
+                  </a:txBody>
+                  <a:tcPr marL="91440" marR="91440" marT="45720" marB="45720" anchor="ctr">
+                    <a:lnL w="6350" cap="flat" cmpd="sng" algn="ctr">
+                      <a:solidFill>
+                        <a:srgbClr val="D6DBE8"/>
+                      </a:solidFill>
+                      <a:prstDash val="solid"/>
+                      <a:round/>
+                      <a:headEnd type="none" w="med" len="med"/>
+                      <a:tailEnd type="none" w="med" len="med"/>
+                    </a:lnL>
+                    <a:lnR w="6350" cap="flat" cmpd="sng" algn="ctr">
+                      <a:solidFill>
+                        <a:srgbClr val="D6DBE8"/>
+                      </a:solidFill>
+                      <a:prstDash val="solid"/>
+                      <a:round/>
+                      <a:headEnd type="none" w="med" len="med"/>
+                      <a:tailEnd type="none" w="med" len="med"/>
+                    </a:lnR>
+                    <a:lnT w="6350" cap="flat" cmpd="sng" algn="ctr">
+                      <a:solidFill>
+                        <a:srgbClr val="D6DBE8"/>
+                      </a:solidFill>
+                      <a:prstDash val="solid"/>
+                      <a:round/>
+                      <a:headEnd type="none" w="med" len="med"/>
+                      <a:tailEnd type="none" w="med" len="med"/>
+                    </a:lnT>
+                    <a:lnB w="6350" cap="flat" cmpd="sng" algn="ctr">
+                      <a:solidFill>
+                        <a:srgbClr val="D6DBE8"/>
+                      </a:solidFill>
+                      <a:prstDash val="solid"/>
+                      <a:round/>
+                      <a:headEnd type="none" w="med" len="med"/>
+                      <a:tailEnd type="none" w="med" len="med"/>
+                    </a:lnB>
+                  </a:tcPr>
+                </a:tc>
+                <a:tc>
+                  <a:txBody>
+                    <a:bodyPr/>
+                    <a:lstStyle/>
+                    <a:p>
+                      <a:pPr algn="ctr" indent="0" marL="0">
+                        <a:buNone/>
+                      </a:pPr>
+                      <a:r>
+                        <a:rPr lang="en-US" sz="1250" dirty="0">
+                          <a:solidFill>
+                            <a:srgbClr val="6B7280"/>
+                          </a:solidFill>
+                          <a:latin typeface="Calibri" pitchFamily="34" charset="0"/>
+                          <a:ea typeface="Calibri" pitchFamily="34" charset="-122"/>
+                          <a:cs typeface="Calibri" pitchFamily="34" charset="-120"/>
+                        </a:rPr>
+                        <a:t>—</a:t>
+                      </a:r>
+                      <a:endParaRPr lang="en-US" sz="1250" dirty="0">
+                        <a:latin typeface="Calibri" charset="0"/>
+                        <a:ea typeface="Calibri" charset="0"/>
+                        <a:cs typeface="Calibri" charset="0"/>
+                      </a:endParaRPr>
+                    </a:p>
+                  </a:txBody>
+                  <a:tcPr marL="91440" marR="91440" marT="45720" marB="45720" anchor="ctr">
+                    <a:lnL w="6350" cap="flat" cmpd="sng" algn="ctr">
+                      <a:solidFill>
+                        <a:srgbClr val="D6DBE8"/>
+                      </a:solidFill>
+                      <a:prstDash val="solid"/>
+                      <a:round/>
+                      <a:headEnd type="none" w="med" len="med"/>
+                      <a:tailEnd type="none" w="med" len="med"/>
+                    </a:lnL>
+                    <a:lnR w="6350" cap="flat" cmpd="sng" algn="ctr">
+                      <a:solidFill>
+                        <a:srgbClr val="D6DBE8"/>
+                      </a:solidFill>
+                      <a:prstDash val="solid"/>
+                      <a:round/>
+                      <a:headEnd type="none" w="med" len="med"/>
+                      <a:tailEnd type="none" w="med" len="med"/>
+                    </a:lnR>
+                    <a:lnT w="6350" cap="flat" cmpd="sng" algn="ctr">
+                      <a:solidFill>
+                        <a:srgbClr val="D6DBE8"/>
+                      </a:solidFill>
+                      <a:prstDash val="solid"/>
+                      <a:round/>
+                      <a:headEnd type="none" w="med" len="med"/>
+                      <a:tailEnd type="none" w="med" len="med"/>
+                    </a:lnT>
+                    <a:lnB w="6350" cap="flat" cmpd="sng" algn="ctr">
+                      <a:solidFill>
+                        <a:srgbClr val="D6DBE8"/>
+                      </a:solidFill>
+                      <a:prstDash val="solid"/>
+                      <a:round/>
+                      <a:headEnd type="none" w="med" len="med"/>
+                      <a:tailEnd type="none" w="med" len="med"/>
+                    </a:lnB>
+                  </a:tcPr>
+                </a:tc>
+              </a:tr>
+              <a:tr h="301752">
+                <a:tc>
+                  <a:txBody>
+                    <a:bodyPr/>
+                    <a:lstStyle/>
+                    <a:p>
+                      <a:pPr algn="l" indent="0" marL="0">
+                        <a:buNone/>
+                      </a:pPr>
+                      <a:r>
+                        <a:rPr lang="en-US" sz="1250" b="1" dirty="0">
+                          <a:solidFill>
+                            <a:srgbClr val="C44E52"/>
+                          </a:solidFill>
+                          <a:latin typeface="Calibri" pitchFamily="34" charset="0"/>
+                          <a:ea typeface="Calibri" pitchFamily="34" charset="-122"/>
+                          <a:cs typeface="Calibri" pitchFamily="34" charset="-120"/>
+                        </a:rPr>
+                        <a:t>Single forward LSTM</a:t>
+                      </a:r>
+                      <a:endParaRPr lang="en-US" sz="1250" dirty="0">
+                        <a:latin typeface="Calibri" charset="0"/>
+                        <a:ea typeface="Calibri" charset="0"/>
+                        <a:cs typeface="Calibri" charset="0"/>
+                      </a:endParaRPr>
+                    </a:p>
+                  </a:txBody>
+                  <a:tcPr marL="91440" marR="91440" marT="45720" marB="45720" anchor="ctr">
+                    <a:lnL w="6350" cap="flat" cmpd="sng" algn="ctr">
+                      <a:solidFill>
+                        <a:srgbClr val="D6DBE8"/>
+                      </a:solidFill>
+                      <a:prstDash val="solid"/>
+                      <a:round/>
+                      <a:headEnd type="none" w="med" len="med"/>
+                      <a:tailEnd type="none" w="med" len="med"/>
+                    </a:lnL>
+                    <a:lnR w="6350" cap="flat" cmpd="sng" algn="ctr">
+                      <a:solidFill>
+                        <a:srgbClr val="D6DBE8"/>
+                      </a:solidFill>
+                      <a:prstDash val="solid"/>
+                      <a:round/>
+                      <a:headEnd type="none" w="med" len="med"/>
+                      <a:tailEnd type="none" w="med" len="med"/>
+                    </a:lnR>
+                    <a:lnT w="6350" cap="flat" cmpd="sng" algn="ctr">
+                      <a:solidFill>
+                        <a:srgbClr val="D6DBE8"/>
+                      </a:solidFill>
+                      <a:prstDash val="solid"/>
+                      <a:round/>
+                      <a:headEnd type="none" w="med" len="med"/>
+                      <a:tailEnd type="none" w="med" len="med"/>
+                    </a:lnT>
+                    <a:lnB w="6350" cap="flat" cmpd="sng" algn="ctr">
+                      <a:solidFill>
+                        <a:srgbClr val="D6DBE8"/>
+                      </a:solidFill>
+                      <a:prstDash val="solid"/>
+                      <a:round/>
+                      <a:headEnd type="none" w="med" len="med"/>
+                      <a:tailEnd type="none" w="med" len="med"/>
+                    </a:lnB>
+                  </a:tcPr>
+                </a:tc>
+                <a:tc>
+                  <a:txBody>
+                    <a:bodyPr/>
+                    <a:lstStyle/>
+                    <a:p>
+                      <a:pPr algn="ctr" indent="0" marL="0">
+                        <a:buNone/>
+                      </a:pPr>
+                      <a:r>
+                        <a:rPr lang="en-US" sz="1250" dirty="0">
+                          <a:solidFill>
+                            <a:srgbClr val="3B4A7A"/>
+                          </a:solidFill>
+                          <a:latin typeface="Calibri" pitchFamily="34" charset="0"/>
+                          <a:ea typeface="Calibri" pitchFamily="34" charset="-122"/>
+                          <a:cs typeface="Calibri" pitchFamily="34" charset="-120"/>
+                        </a:rPr>
+                        <a:t>12</a:t>
+                      </a:r>
+                      <a:endParaRPr lang="en-US" sz="1250" dirty="0">
+                        <a:latin typeface="Calibri" charset="0"/>
+                        <a:ea typeface="Calibri" charset="0"/>
+                        <a:cs typeface="Calibri" charset="0"/>
+                      </a:endParaRPr>
+                    </a:p>
+                  </a:txBody>
+                  <a:tcPr marL="91440" marR="91440" marT="45720" marB="45720" anchor="ctr">
+                    <a:lnL w="6350" cap="flat" cmpd="sng" algn="ctr">
+                      <a:solidFill>
+                        <a:srgbClr val="D6DBE8"/>
+                      </a:solidFill>
+                      <a:prstDash val="solid"/>
+                      <a:round/>
+                      <a:headEnd type="none" w="med" len="med"/>
+                      <a:tailEnd type="none" w="med" len="med"/>
+                    </a:lnL>
+                    <a:lnR w="6350" cap="flat" cmpd="sng" algn="ctr">
+                      <a:solidFill>
+                        <a:srgbClr val="D6DBE8"/>
+                      </a:solidFill>
+                      <a:prstDash val="solid"/>
+                      <a:round/>
+                      <a:headEnd type="none" w="med" len="med"/>
+                      <a:tailEnd type="none" w="med" len="med"/>
+                    </a:lnR>
+                    <a:lnT w="6350" cap="flat" cmpd="sng" algn="ctr">
+                      <a:solidFill>
+                        <a:srgbClr val="D6DBE8"/>
+                      </a:solidFill>
+                      <a:prstDash val="solid"/>
+                      <a:round/>
+                      <a:headEnd type="none" w="med" len="med"/>
+                      <a:tailEnd type="none" w="med" len="med"/>
+                    </a:lnT>
+                    <a:lnB w="6350" cap="flat" cmpd="sng" algn="ctr">
+                      <a:solidFill>
+                        <a:srgbClr val="D6DBE8"/>
+                      </a:solidFill>
+                      <a:prstDash val="solid"/>
+                      <a:round/>
+                      <a:headEnd type="none" w="med" len="med"/>
+                      <a:tailEnd type="none" w="med" len="med"/>
+                    </a:lnB>
+                  </a:tcPr>
+                </a:tc>
+                <a:tc>
+                  <a:txBody>
+                    <a:bodyPr/>
+                    <a:lstStyle/>
+                    <a:p>
+                      <a:pPr algn="ctr" indent="0" marL="0">
+                        <a:buNone/>
+                      </a:pPr>
+                      <a:r>
+                        <a:rPr lang="en-US" sz="1250" b="1" dirty="0">
+                          <a:solidFill>
+                            <a:srgbClr val="C44E52"/>
+                          </a:solidFill>
+                          <a:latin typeface="Calibri" pitchFamily="34" charset="0"/>
+                          <a:ea typeface="Calibri" pitchFamily="34" charset="-122"/>
+                          <a:cs typeface="Calibri" pitchFamily="34" charset="-120"/>
+                        </a:rPr>
+                        <a:t>3.89</a:t>
+                      </a:r>
+                      <a:endParaRPr lang="en-US" sz="1250" dirty="0">
+                        <a:latin typeface="Calibri" charset="0"/>
+                        <a:ea typeface="Calibri" charset="0"/>
+                        <a:cs typeface="Calibri" charset="0"/>
+                      </a:endParaRPr>
+                    </a:p>
+                  </a:txBody>
+                  <a:tcPr marL="91440" marR="91440" marT="45720" marB="45720" anchor="ctr">
+                    <a:lnL w="6350" cap="flat" cmpd="sng" algn="ctr">
+                      <a:solidFill>
+                        <a:srgbClr val="D6DBE8"/>
+                      </a:solidFill>
+                      <a:prstDash val="solid"/>
+                      <a:round/>
+                      <a:headEnd type="none" w="med" len="med"/>
+                      <a:tailEnd type="none" w="med" len="med"/>
+                    </a:lnL>
+                    <a:lnR w="6350" cap="flat" cmpd="sng" algn="ctr">
+                      <a:solidFill>
+                        <a:srgbClr val="D6DBE8"/>
+                      </a:solidFill>
+                      <a:prstDash val="solid"/>
+                      <a:round/>
+                      <a:headEnd type="none" w="med" len="med"/>
+                      <a:tailEnd type="none" w="med" len="med"/>
+                    </a:lnR>
+                    <a:lnT w="6350" cap="flat" cmpd="sng" algn="ctr">
+                      <a:solidFill>
+                        <a:srgbClr val="D6DBE8"/>
+                      </a:solidFill>
+                      <a:prstDash val="solid"/>
+                      <a:round/>
+                      <a:headEnd type="none" w="med" len="med"/>
+                      <a:tailEnd type="none" w="med" len="med"/>
+                    </a:lnT>
+                    <a:lnB w="6350" cap="flat" cmpd="sng" algn="ctr">
+                      <a:solidFill>
+                        <a:srgbClr val="D6DBE8"/>
+                      </a:solidFill>
+                      <a:prstDash val="solid"/>
+                      <a:round/>
+                      <a:headEnd type="none" w="med" len="med"/>
+                      <a:tailEnd type="none" w="med" len="med"/>
+                    </a:lnB>
+                  </a:tcPr>
+                </a:tc>
+                <a:tc>
+                  <a:txBody>
+                    <a:bodyPr/>
+                    <a:lstStyle/>
+                    <a:p>
+                      <a:pPr algn="ctr" indent="0" marL="0">
+                        <a:buNone/>
+                      </a:pPr>
+                      <a:r>
+                        <a:rPr lang="en-US" sz="1250" dirty="0">
+                          <a:solidFill>
+                            <a:srgbClr val="3B4A7A"/>
+                          </a:solidFill>
+                          <a:latin typeface="Calibri" pitchFamily="34" charset="0"/>
+                          <a:ea typeface="Calibri" pitchFamily="34" charset="-122"/>
+                          <a:cs typeface="Calibri" pitchFamily="34" charset="-120"/>
+                        </a:rPr>
+                        <a:t>2.71</a:t>
+                      </a:r>
+                      <a:endParaRPr lang="en-US" sz="1250" dirty="0">
+                        <a:latin typeface="Calibri" charset="0"/>
+                        <a:ea typeface="Calibri" charset="0"/>
+                        <a:cs typeface="Calibri" charset="0"/>
+                      </a:endParaRPr>
+                    </a:p>
+                  </a:txBody>
+                  <a:tcPr marL="91440" marR="91440" marT="45720" marB="45720" anchor="ctr">
+                    <a:lnL w="6350" cap="flat" cmpd="sng" algn="ctr">
+                      <a:solidFill>
+                        <a:srgbClr val="D6DBE8"/>
+                      </a:solidFill>
+                      <a:prstDash val="solid"/>
+                      <a:round/>
+                      <a:headEnd type="none" w="med" len="med"/>
+                      <a:tailEnd type="none" w="med" len="med"/>
+                    </a:lnL>
+                    <a:lnR w="6350" cap="flat" cmpd="sng" algn="ctr">
+                      <a:solidFill>
+                        <a:srgbClr val="D6DBE8"/>
+                      </a:solidFill>
+                      <a:prstDash val="solid"/>
+                      <a:round/>
+                      <a:headEnd type="none" w="med" len="med"/>
+                      <a:tailEnd type="none" w="med" len="med"/>
+                    </a:lnR>
+                    <a:lnT w="6350" cap="flat" cmpd="sng" algn="ctr">
+                      <a:solidFill>
+                        <a:srgbClr val="D6DBE8"/>
+                      </a:solidFill>
+                      <a:prstDash val="solid"/>
+                      <a:round/>
+                      <a:headEnd type="none" w="med" len="med"/>
+                      <a:tailEnd type="none" w="med" len="med"/>
+                    </a:lnT>
+                    <a:lnB w="6350" cap="flat" cmpd="sng" algn="ctr">
+                      <a:solidFill>
+                        <a:srgbClr val="D6DBE8"/>
+                      </a:solidFill>
+                      <a:prstDash val="solid"/>
+                      <a:round/>
+                      <a:headEnd type="none" w="med" len="med"/>
+                      <a:tailEnd type="none" w="med" len="med"/>
+                    </a:lnB>
+                  </a:tcPr>
+                </a:tc>
+                <a:tc>
+                  <a:txBody>
+                    <a:bodyPr/>
+                    <a:lstStyle/>
+                    <a:p>
+                      <a:pPr algn="ctr" indent="0" marL="0">
+                        <a:buNone/>
+                      </a:pPr>
+                      <a:r>
+                        <a:rPr lang="en-US" sz="1250" dirty="0">
+                          <a:solidFill>
+                            <a:srgbClr val="3B4A7A"/>
+                          </a:solidFill>
+                          <a:latin typeface="Calibri" pitchFamily="34" charset="0"/>
+                          <a:ea typeface="Calibri" pitchFamily="34" charset="-122"/>
+                          <a:cs typeface="Calibri" pitchFamily="34" charset="-120"/>
+                        </a:rPr>
+                        <a:t>32.89</a:t>
+                      </a:r>
+                      <a:endParaRPr lang="en-US" sz="1250" dirty="0">
+                        <a:latin typeface="Calibri" charset="0"/>
+                        <a:ea typeface="Calibri" charset="0"/>
+                        <a:cs typeface="Calibri" charset="0"/>
+                      </a:endParaRPr>
+                    </a:p>
+                  </a:txBody>
+                  <a:tcPr marL="91440" marR="91440" marT="45720" marB="45720" anchor="ctr">
+                    <a:lnL w="6350" cap="flat" cmpd="sng" algn="ctr">
+                      <a:solidFill>
+                        <a:srgbClr val="D6DBE8"/>
+                      </a:solidFill>
+                      <a:prstDash val="solid"/>
+                      <a:round/>
+                      <a:headEnd type="none" w="med" len="med"/>
+                      <a:tailEnd type="none" w="med" len="med"/>
+                    </a:lnL>
+                    <a:lnR w="6350" cap="flat" cmpd="sng" algn="ctr">
+                      <a:solidFill>
+                        <a:srgbClr val="D6DBE8"/>
+                      </a:solidFill>
+                      <a:prstDash val="solid"/>
+                      <a:round/>
+                      <a:headEnd type="none" w="med" len="med"/>
+                      <a:tailEnd type="none" w="med" len="med"/>
+                    </a:lnR>
+                    <a:lnT w="6350" cap="flat" cmpd="sng" algn="ctr">
+                      <a:solidFill>
+                        <a:srgbClr val="D6DBE8"/>
+                      </a:solidFill>
+                      <a:prstDash val="solid"/>
+                      <a:round/>
+                      <a:headEnd type="none" w="med" len="med"/>
+                      <a:tailEnd type="none" w="med" len="med"/>
+                    </a:lnT>
+                    <a:lnB w="6350" cap="flat" cmpd="sng" algn="ctr">
+                      <a:solidFill>
+                        <a:srgbClr val="D6DBE8"/>
+                      </a:solidFill>
+                      <a:prstDash val="solid"/>
+                      <a:round/>
+                      <a:headEnd type="none" w="med" len="med"/>
+                      <a:tailEnd type="none" w="med" len="med"/>
+                    </a:lnB>
+                  </a:tcPr>
+                </a:tc>
+                <a:tc>
+                  <a:txBody>
+                    <a:bodyPr/>
+                    <a:lstStyle/>
+                    <a:p>
+                      <a:pPr algn="ctr" indent="0" marL="0">
+                        <a:buNone/>
+                      </a:pPr>
+                      <a:r>
+                        <a:rPr lang="en-US" sz="1250" dirty="0">
+                          <a:solidFill>
+                            <a:srgbClr val="6B7280"/>
+                          </a:solidFill>
+                          <a:latin typeface="Calibri" pitchFamily="34" charset="0"/>
+                          <a:ea typeface="Calibri" pitchFamily="34" charset="-122"/>
+                          <a:cs typeface="Calibri" pitchFamily="34" charset="-120"/>
+                        </a:rPr>
+                        <a:t>26.17</a:t>
+                      </a:r>
+                      <a:endParaRPr lang="en-US" sz="1250" dirty="0">
+                        <a:latin typeface="Calibri" charset="0"/>
+                        <a:ea typeface="Calibri" charset="0"/>
+                        <a:cs typeface="Calibri" charset="0"/>
+                      </a:endParaRPr>
+                    </a:p>
+                  </a:txBody>
+                  <a:tcPr marL="91440" marR="91440" marT="45720" marB="45720" anchor="ctr">
+                    <a:lnL w="6350" cap="flat" cmpd="sng" algn="ctr">
+                      <a:solidFill>
+                        <a:srgbClr val="D6DBE8"/>
+                      </a:solidFill>
+                      <a:prstDash val="solid"/>
+                      <a:round/>
+                      <a:headEnd type="none" w="med" len="med"/>
+                      <a:tailEnd type="none" w="med" len="med"/>
+                    </a:lnL>
+                    <a:lnR w="6350" cap="flat" cmpd="sng" algn="ctr">
+                      <a:solidFill>
+                        <a:srgbClr val="D6DBE8"/>
+                      </a:solidFill>
+                      <a:prstDash val="solid"/>
+                      <a:round/>
+                      <a:headEnd type="none" w="med" len="med"/>
+                      <a:tailEnd type="none" w="med" len="med"/>
+                    </a:lnR>
+                    <a:lnT w="6350" cap="flat" cmpd="sng" algn="ctr">
+                      <a:solidFill>
+                        <a:srgbClr val="D6DBE8"/>
+                      </a:solidFill>
+                      <a:prstDash val="solid"/>
+                      <a:round/>
+                      <a:headEnd type="none" w="med" len="med"/>
+                      <a:tailEnd type="none" w="med" len="med"/>
+                    </a:lnT>
+                    <a:lnB w="6350" cap="flat" cmpd="sng" algn="ctr">
+                      <a:solidFill>
+                        <a:srgbClr val="D6DBE8"/>
+                      </a:solidFill>
+                      <a:prstDash val="solid"/>
+                      <a:round/>
+                      <a:headEnd type="none" w="med" len="med"/>
+                      <a:tailEnd type="none" w="med" len="med"/>
+                    </a:lnB>
+                  </a:tcPr>
+                </a:tc>
+              </a:tr>
+              <a:tr h="301752">
+                <a:tc>
+                  <a:txBody>
+                    <a:bodyPr/>
+                    <a:lstStyle/>
+                    <a:p>
+                      <a:pPr algn="l" indent="0" marL="0">
+                        <a:buNone/>
+                      </a:pPr>
+                      <a:r>
+                        <a:rPr lang="en-US" sz="1250" dirty="0">
+                          <a:solidFill>
+                            <a:srgbClr val="4C72B0"/>
+                          </a:solidFill>
+                          <a:latin typeface="Calibri" pitchFamily="34" charset="0"/>
+                          <a:ea typeface="Calibri" pitchFamily="34" charset="-122"/>
+                          <a:cs typeface="Calibri" pitchFamily="34" charset="-120"/>
+                        </a:rPr>
+                        <a:t>Single reversed LSTM</a:t>
+                      </a:r>
+                      <a:endParaRPr lang="en-US" sz="1250" dirty="0">
+                        <a:latin typeface="Calibri" charset="0"/>
+                        <a:ea typeface="Calibri" charset="0"/>
+                        <a:cs typeface="Calibri" charset="0"/>
+                      </a:endParaRPr>
+                    </a:p>
+                  </a:txBody>
+                  <a:tcPr marL="91440" marR="91440" marT="45720" marB="45720" anchor="ctr">
+                    <a:lnL w="6350" cap="flat" cmpd="sng" algn="ctr">
+                      <a:solidFill>
+                        <a:srgbClr val="D6DBE8"/>
+                      </a:solidFill>
+                      <a:prstDash val="solid"/>
+                      <a:round/>
+                      <a:headEnd type="none" w="med" len="med"/>
+                      <a:tailEnd type="none" w="med" len="med"/>
+                    </a:lnL>
+                    <a:lnR w="6350" cap="flat" cmpd="sng" algn="ctr">
+                      <a:solidFill>
+                        <a:srgbClr val="D6DBE8"/>
+                      </a:solidFill>
+                      <a:prstDash val="solid"/>
+                      <a:round/>
+                      <a:headEnd type="none" w="med" len="med"/>
+                      <a:tailEnd type="none" w="med" len="med"/>
+                    </a:lnR>
+                    <a:lnT w="6350" cap="flat" cmpd="sng" algn="ctr">
+                      <a:solidFill>
+                        <a:srgbClr val="D6DBE8"/>
+                      </a:solidFill>
+                      <a:prstDash val="solid"/>
+                      <a:round/>
+                      <a:headEnd type="none" w="med" len="med"/>
+                      <a:tailEnd type="none" w="med" len="med"/>
+                    </a:lnT>
+                    <a:lnB w="6350" cap="flat" cmpd="sng" algn="ctr">
+                      <a:solidFill>
+                        <a:srgbClr val="D6DBE8"/>
+                      </a:solidFill>
+                      <a:prstDash val="solid"/>
+                      <a:round/>
+                      <a:headEnd type="none" w="med" len="med"/>
+                      <a:tailEnd type="none" w="med" len="med"/>
+                    </a:lnB>
+                  </a:tcPr>
+                </a:tc>
+                <a:tc>
+                  <a:txBody>
+                    <a:bodyPr/>
+                    <a:lstStyle/>
+                    <a:p>
+                      <a:pPr algn="ctr" indent="0" marL="0">
+                        <a:buNone/>
+                      </a:pPr>
+                      <a:r>
+                        <a:rPr lang="en-US" sz="1250" dirty="0">
+                          <a:solidFill>
+                            <a:srgbClr val="3B4A7A"/>
+                          </a:solidFill>
+                          <a:latin typeface="Calibri" pitchFamily="34" charset="0"/>
+                          <a:ea typeface="Calibri" pitchFamily="34" charset="-122"/>
+                          <a:cs typeface="Calibri" pitchFamily="34" charset="-120"/>
+                        </a:rPr>
+                        <a:t>1</a:t>
+                      </a:r>
+                      <a:endParaRPr lang="en-US" sz="1250" dirty="0">
+                        <a:latin typeface="Calibri" charset="0"/>
+                        <a:ea typeface="Calibri" charset="0"/>
+                        <a:cs typeface="Calibri" charset="0"/>
+                      </a:endParaRPr>
+                    </a:p>
+                  </a:txBody>
+                  <a:tcPr marL="91440" marR="91440" marT="45720" marB="45720" anchor="ctr">
+                    <a:lnL w="6350" cap="flat" cmpd="sng" algn="ctr">
+                      <a:solidFill>
+                        <a:srgbClr val="D6DBE8"/>
+                      </a:solidFill>
+                      <a:prstDash val="solid"/>
+                      <a:round/>
+                      <a:headEnd type="none" w="med" len="med"/>
+                      <a:tailEnd type="none" w="med" len="med"/>
+                    </a:lnL>
+                    <a:lnR w="6350" cap="flat" cmpd="sng" algn="ctr">
+                      <a:solidFill>
+                        <a:srgbClr val="D6DBE8"/>
+                      </a:solidFill>
+                      <a:prstDash val="solid"/>
+                      <a:round/>
+                      <a:headEnd type="none" w="med" len="med"/>
+                      <a:tailEnd type="none" w="med" len="med"/>
+                    </a:lnR>
+                    <a:lnT w="6350" cap="flat" cmpd="sng" algn="ctr">
+                      <a:solidFill>
+                        <a:srgbClr val="D6DBE8"/>
+                      </a:solidFill>
+                      <a:prstDash val="solid"/>
+                      <a:round/>
+                      <a:headEnd type="none" w="med" len="med"/>
+                      <a:tailEnd type="none" w="med" len="med"/>
+                    </a:lnT>
+                    <a:lnB w="6350" cap="flat" cmpd="sng" algn="ctr">
+                      <a:solidFill>
+                        <a:srgbClr val="D6DBE8"/>
+                      </a:solidFill>
+                      <a:prstDash val="solid"/>
+                      <a:round/>
+                      <a:headEnd type="none" w="med" len="med"/>
+                      <a:tailEnd type="none" w="med" len="med"/>
+                    </a:lnB>
+                  </a:tcPr>
+                </a:tc>
+                <a:tc>
+                  <a:txBody>
+                    <a:bodyPr/>
+                    <a:lstStyle/>
+                    <a:p>
+                      <a:pPr algn="ctr" indent="0" marL="0">
+                        <a:buNone/>
+                      </a:pPr>
+                      <a:r>
+                        <a:rPr lang="en-US" sz="1250" b="1" dirty="0">
+                          <a:solidFill>
+                            <a:srgbClr val="4C72B0"/>
+                          </a:solidFill>
+                          <a:latin typeface="Calibri" pitchFamily="34" charset="0"/>
+                          <a:ea typeface="Calibri" pitchFamily="34" charset="-122"/>
+                          <a:cs typeface="Calibri" pitchFamily="34" charset="-120"/>
+                        </a:rPr>
+                        <a:t>6.41</a:t>
+                      </a:r>
+                      <a:endParaRPr lang="en-US" sz="1250" dirty="0">
+                        <a:latin typeface="Calibri" charset="0"/>
+                        <a:ea typeface="Calibri" charset="0"/>
+                        <a:cs typeface="Calibri" charset="0"/>
+                      </a:endParaRPr>
+                    </a:p>
+                  </a:txBody>
+                  <a:tcPr marL="91440" marR="91440" marT="45720" marB="45720" anchor="ctr">
+                    <a:lnL w="6350" cap="flat" cmpd="sng" algn="ctr">
+                      <a:solidFill>
+                        <a:srgbClr val="D6DBE8"/>
+                      </a:solidFill>
+                      <a:prstDash val="solid"/>
+                      <a:round/>
+                      <a:headEnd type="none" w="med" len="med"/>
+                      <a:tailEnd type="none" w="med" len="med"/>
+                    </a:lnL>
+                    <a:lnR w="6350" cap="flat" cmpd="sng" algn="ctr">
+                      <a:solidFill>
+                        <a:srgbClr val="D6DBE8"/>
+                      </a:solidFill>
+                      <a:prstDash val="solid"/>
+                      <a:round/>
+                      <a:headEnd type="none" w="med" len="med"/>
+                      <a:tailEnd type="none" w="med" len="med"/>
+                    </a:lnR>
+                    <a:lnT w="6350" cap="flat" cmpd="sng" algn="ctr">
+                      <a:solidFill>
+                        <a:srgbClr val="D6DBE8"/>
+                      </a:solidFill>
+                      <a:prstDash val="solid"/>
+                      <a:round/>
+                      <a:headEnd type="none" w="med" len="med"/>
+                      <a:tailEnd type="none" w="med" len="med"/>
+                    </a:lnT>
+                    <a:lnB w="6350" cap="flat" cmpd="sng" algn="ctr">
+                      <a:solidFill>
+                        <a:srgbClr val="D6DBE8"/>
+                      </a:solidFill>
+                      <a:prstDash val="solid"/>
+                      <a:round/>
+                      <a:headEnd type="none" w="med" len="med"/>
+                      <a:tailEnd type="none" w="med" len="med"/>
+                    </a:lnB>
+                  </a:tcPr>
+                </a:tc>
+                <a:tc>
+                  <a:txBody>
+                    <a:bodyPr/>
+                    <a:lstStyle/>
+                    <a:p>
+                      <a:pPr algn="ctr" indent="0" marL="0">
+                        <a:buNone/>
+                      </a:pPr>
+                      <a:r>
+                        <a:rPr lang="en-US" sz="1250" dirty="0">
+                          <a:solidFill>
+                            <a:srgbClr val="3B4A7A"/>
+                          </a:solidFill>
+                          <a:latin typeface="Calibri" pitchFamily="34" charset="0"/>
+                          <a:ea typeface="Calibri" pitchFamily="34" charset="-122"/>
+                          <a:cs typeface="Calibri" pitchFamily="34" charset="-120"/>
+                        </a:rPr>
+                        <a:t>4.46</a:t>
+                      </a:r>
+                      <a:endParaRPr lang="en-US" sz="1250" dirty="0">
+                        <a:latin typeface="Calibri" charset="0"/>
+                        <a:ea typeface="Calibri" charset="0"/>
+                        <a:cs typeface="Calibri" charset="0"/>
+                      </a:endParaRPr>
+                    </a:p>
+                  </a:txBody>
+                  <a:tcPr marL="91440" marR="91440" marT="45720" marB="45720" anchor="ctr">
+                    <a:lnL w="6350" cap="flat" cmpd="sng" algn="ctr">
+                      <a:solidFill>
+                        <a:srgbClr val="D6DBE8"/>
+                      </a:solidFill>
+                      <a:prstDash val="solid"/>
+                      <a:round/>
+                      <a:headEnd type="none" w="med" len="med"/>
+                      <a:tailEnd type="none" w="med" len="med"/>
+                    </a:lnL>
+                    <a:lnR w="6350" cap="flat" cmpd="sng" algn="ctr">
+                      <a:solidFill>
+                        <a:srgbClr val="D6DBE8"/>
+                      </a:solidFill>
+                      <a:prstDash val="solid"/>
+                      <a:round/>
+                      <a:headEnd type="none" w="med" len="med"/>
+                      <a:tailEnd type="none" w="med" len="med"/>
+                    </a:lnR>
+                    <a:lnT w="6350" cap="flat" cmpd="sng" algn="ctr">
+                      <a:solidFill>
+                        <a:srgbClr val="D6DBE8"/>
+                      </a:solidFill>
+                      <a:prstDash val="solid"/>
+                      <a:round/>
+                      <a:headEnd type="none" w="med" len="med"/>
+                      <a:tailEnd type="none" w="med" len="med"/>
+                    </a:lnT>
+                    <a:lnB w="6350" cap="flat" cmpd="sng" algn="ctr">
+                      <a:solidFill>
+                        <a:srgbClr val="D6DBE8"/>
+                      </a:solidFill>
+                      <a:prstDash val="solid"/>
+                      <a:round/>
+                      <a:headEnd type="none" w="med" len="med"/>
+                      <a:tailEnd type="none" w="med" len="med"/>
+                    </a:lnB>
+                  </a:tcPr>
+                </a:tc>
+                <a:tc>
+                  <a:txBody>
+                    <a:bodyPr/>
+                    <a:lstStyle/>
+                    <a:p>
+                      <a:pPr algn="ctr" indent="0" marL="0">
+                        <a:buNone/>
+                      </a:pPr>
+                      <a:r>
+                        <a:rPr lang="en-US" sz="1250" dirty="0">
+                          <a:solidFill>
+                            <a:srgbClr val="3B4A7A"/>
+                          </a:solidFill>
+                          <a:latin typeface="Calibri" pitchFamily="34" charset="0"/>
+                          <a:ea typeface="Calibri" pitchFamily="34" charset="-122"/>
+                          <a:cs typeface="Calibri" pitchFamily="34" charset="-120"/>
+                        </a:rPr>
+                        <a:t>24.50</a:t>
+                      </a:r>
+                      <a:endParaRPr lang="en-US" sz="1250" dirty="0">
+                        <a:latin typeface="Calibri" charset="0"/>
+                        <a:ea typeface="Calibri" charset="0"/>
+                        <a:cs typeface="Calibri" charset="0"/>
+                      </a:endParaRPr>
+                    </a:p>
+                  </a:txBody>
+                  <a:tcPr marL="91440" marR="91440" marT="45720" marB="45720" anchor="ctr">
+                    <a:lnL w="6350" cap="flat" cmpd="sng" algn="ctr">
+                      <a:solidFill>
+                        <a:srgbClr val="D6DBE8"/>
+                      </a:solidFill>
+                      <a:prstDash val="solid"/>
+                      <a:round/>
+                      <a:headEnd type="none" w="med" len="med"/>
+                      <a:tailEnd type="none" w="med" len="med"/>
+                    </a:lnL>
+                    <a:lnR w="6350" cap="flat" cmpd="sng" algn="ctr">
+                      <a:solidFill>
+                        <a:srgbClr val="D6DBE8"/>
+                      </a:solidFill>
+                      <a:prstDash val="solid"/>
+                      <a:round/>
+                      <a:headEnd type="none" w="med" len="med"/>
+                      <a:tailEnd type="none" w="med" len="med"/>
+                    </a:lnR>
+                    <a:lnT w="6350" cap="flat" cmpd="sng" algn="ctr">
+                      <a:solidFill>
+                        <a:srgbClr val="D6DBE8"/>
+                      </a:solidFill>
+                      <a:prstDash val="solid"/>
+                      <a:round/>
+                      <a:headEnd type="none" w="med" len="med"/>
+                      <a:tailEnd type="none" w="med" len="med"/>
+                    </a:lnT>
+                    <a:lnB w="6350" cap="flat" cmpd="sng" algn="ctr">
+                      <a:solidFill>
+                        <a:srgbClr val="D6DBE8"/>
+                      </a:solidFill>
+                      <a:prstDash val="solid"/>
+                      <a:round/>
+                      <a:headEnd type="none" w="med" len="med"/>
+                      <a:tailEnd type="none" w="med" len="med"/>
+                    </a:lnB>
+                  </a:tcPr>
+                </a:tc>
+                <a:tc>
+                  <a:txBody>
+                    <a:bodyPr/>
+                    <a:lstStyle/>
+                    <a:p>
+                      <a:pPr algn="ctr" indent="0" marL="0">
+                        <a:buNone/>
+                      </a:pPr>
+                      <a:r>
+                        <a:rPr lang="en-US" sz="1250" dirty="0">
+                          <a:solidFill>
+                            <a:srgbClr val="6B7280"/>
+                          </a:solidFill>
+                          <a:latin typeface="Calibri" pitchFamily="34" charset="0"/>
+                          <a:ea typeface="Calibri" pitchFamily="34" charset="-122"/>
+                          <a:cs typeface="Calibri" pitchFamily="34" charset="-120"/>
+                        </a:rPr>
+                        <a:t>—</a:t>
+                      </a:r>
+                      <a:endParaRPr lang="en-US" sz="1250" dirty="0">
+                        <a:latin typeface="Calibri" charset="0"/>
+                        <a:ea typeface="Calibri" charset="0"/>
+                        <a:cs typeface="Calibri" charset="0"/>
+                      </a:endParaRPr>
+                    </a:p>
+                  </a:txBody>
+                  <a:tcPr marL="91440" marR="91440" marT="45720" marB="45720" anchor="ctr">
+                    <a:lnL w="6350" cap="flat" cmpd="sng" algn="ctr">
+                      <a:solidFill>
+                        <a:srgbClr val="D6DBE8"/>
+                      </a:solidFill>
+                      <a:prstDash val="solid"/>
+                      <a:round/>
+                      <a:headEnd type="none" w="med" len="med"/>
+                      <a:tailEnd type="none" w="med" len="med"/>
+                    </a:lnL>
+                    <a:lnR w="6350" cap="flat" cmpd="sng" algn="ctr">
+                      <a:solidFill>
+                        <a:srgbClr val="D6DBE8"/>
+                      </a:solidFill>
+                      <a:prstDash val="solid"/>
+                      <a:round/>
+                      <a:headEnd type="none" w="med" len="med"/>
+                      <a:tailEnd type="none" w="med" len="med"/>
+                    </a:lnR>
+                    <a:lnT w="6350" cap="flat" cmpd="sng" algn="ctr">
+                      <a:solidFill>
+                        <a:srgbClr val="D6DBE8"/>
+                      </a:solidFill>
+                      <a:prstDash val="solid"/>
+                      <a:round/>
+                      <a:headEnd type="none" w="med" len="med"/>
+                      <a:tailEnd type="none" w="med" len="med"/>
+                    </a:lnT>
+                    <a:lnB w="6350" cap="flat" cmpd="sng" algn="ctr">
+                      <a:solidFill>
+                        <a:srgbClr val="D6DBE8"/>
+                      </a:solidFill>
+                      <a:prstDash val="solid"/>
+                      <a:round/>
+                      <a:headEnd type="none" w="med" len="med"/>
+                      <a:tailEnd type="none" w="med" len="med"/>
+                    </a:lnB>
+                  </a:tcPr>
+                </a:tc>
+              </a:tr>
+              <a:tr h="301752">
+                <a:tc>
+                  <a:txBody>
+                    <a:bodyPr/>
+                    <a:lstStyle/>
+                    <a:p>
+                      <a:pPr algn="l" indent="0" marL="0">
+                        <a:buNone/>
+                      </a:pPr>
+                      <a:r>
+                        <a:rPr lang="en-US" sz="1250" dirty="0">
+                          <a:solidFill>
+                            <a:srgbClr val="4C72B0"/>
+                          </a:solidFill>
+                          <a:latin typeface="Calibri" pitchFamily="34" charset="0"/>
+                          <a:ea typeface="Calibri" pitchFamily="34" charset="-122"/>
+                          <a:cs typeface="Calibri" pitchFamily="34" charset="-120"/>
+                        </a:rPr>
+                        <a:t>Single reversed LSTM</a:t>
+                      </a:r>
+                      <a:endParaRPr lang="en-US" sz="1250" dirty="0">
+                        <a:latin typeface="Calibri" charset="0"/>
+                        <a:ea typeface="Calibri" charset="0"/>
+                        <a:cs typeface="Calibri" charset="0"/>
+                      </a:endParaRPr>
+                    </a:p>
+                  </a:txBody>
+                  <a:tcPr marL="91440" marR="91440" marT="45720" marB="45720" anchor="ctr">
+                    <a:lnL w="6350" cap="flat" cmpd="sng" algn="ctr">
+                      <a:solidFill>
+                        <a:srgbClr val="D6DBE8"/>
+                      </a:solidFill>
+                      <a:prstDash val="solid"/>
+                      <a:round/>
+                      <a:headEnd type="none" w="med" len="med"/>
+                      <a:tailEnd type="none" w="med" len="med"/>
+                    </a:lnL>
+                    <a:lnR w="6350" cap="flat" cmpd="sng" algn="ctr">
+                      <a:solidFill>
+                        <a:srgbClr val="D6DBE8"/>
+                      </a:solidFill>
+                      <a:prstDash val="solid"/>
+                      <a:round/>
+                      <a:headEnd type="none" w="med" len="med"/>
+                      <a:tailEnd type="none" w="med" len="med"/>
+                    </a:lnR>
+                    <a:lnT w="6350" cap="flat" cmpd="sng" algn="ctr">
+                      <a:solidFill>
+                        <a:srgbClr val="D6DBE8"/>
+                      </a:solidFill>
+                      <a:prstDash val="solid"/>
+                      <a:round/>
+                      <a:headEnd type="none" w="med" len="med"/>
+                      <a:tailEnd type="none" w="med" len="med"/>
+                    </a:lnT>
+                    <a:lnB w="6350" cap="flat" cmpd="sng" algn="ctr">
+                      <a:solidFill>
+                        <a:srgbClr val="D6DBE8"/>
+                      </a:solidFill>
+                      <a:prstDash val="solid"/>
+                      <a:round/>
+                      <a:headEnd type="none" w="med" len="med"/>
+                      <a:tailEnd type="none" w="med" len="med"/>
+                    </a:lnB>
+                  </a:tcPr>
+                </a:tc>
+                <a:tc>
+                  <a:txBody>
+                    <a:bodyPr/>
+                    <a:lstStyle/>
+                    <a:p>
+                      <a:pPr algn="ctr" indent="0" marL="0">
+                        <a:buNone/>
+                      </a:pPr>
+                      <a:r>
+                        <a:rPr lang="en-US" sz="1250" dirty="0">
+                          <a:solidFill>
+                            <a:srgbClr val="3B4A7A"/>
+                          </a:solidFill>
+                          <a:latin typeface="Calibri" pitchFamily="34" charset="0"/>
+                          <a:ea typeface="Calibri" pitchFamily="34" charset="-122"/>
+                          <a:cs typeface="Calibri" pitchFamily="34" charset="-120"/>
+                        </a:rPr>
+                        <a:t>2</a:t>
+                      </a:r>
+                      <a:endParaRPr lang="en-US" sz="1250" dirty="0">
+                        <a:latin typeface="Calibri" charset="0"/>
+                        <a:ea typeface="Calibri" charset="0"/>
+                        <a:cs typeface="Calibri" charset="0"/>
+                      </a:endParaRPr>
+                    </a:p>
+                  </a:txBody>
+                  <a:tcPr marL="91440" marR="91440" marT="45720" marB="45720" anchor="ctr">
+                    <a:lnL w="6350" cap="flat" cmpd="sng" algn="ctr">
+                      <a:solidFill>
+                        <a:srgbClr val="D6DBE8"/>
+                      </a:solidFill>
+                      <a:prstDash val="solid"/>
+                      <a:round/>
+                      <a:headEnd type="none" w="med" len="med"/>
+                      <a:tailEnd type="none" w="med" len="med"/>
+                    </a:lnL>
+                    <a:lnR w="6350" cap="flat" cmpd="sng" algn="ctr">
+                      <a:solidFill>
+                        <a:srgbClr val="D6DBE8"/>
+                      </a:solidFill>
+                      <a:prstDash val="solid"/>
+                      <a:round/>
+                      <a:headEnd type="none" w="med" len="med"/>
+                      <a:tailEnd type="none" w="med" len="med"/>
+                    </a:lnR>
+                    <a:lnT w="6350" cap="flat" cmpd="sng" algn="ctr">
+                      <a:solidFill>
+                        <a:srgbClr val="D6DBE8"/>
+                      </a:solidFill>
+                      <a:prstDash val="solid"/>
+                      <a:round/>
+                      <a:headEnd type="none" w="med" len="med"/>
+                      <a:tailEnd type="none" w="med" len="med"/>
+                    </a:lnT>
+                    <a:lnB w="6350" cap="flat" cmpd="sng" algn="ctr">
+                      <a:solidFill>
+                        <a:srgbClr val="D6DBE8"/>
+                      </a:solidFill>
+                      <a:prstDash val="solid"/>
+                      <a:round/>
+                      <a:headEnd type="none" w="med" len="med"/>
+                      <a:tailEnd type="none" w="med" len="med"/>
+                    </a:lnB>
+                  </a:tcPr>
+                </a:tc>
+                <a:tc>
+                  <a:txBody>
+                    <a:bodyPr/>
+                    <a:lstStyle/>
+                    <a:p>
+                      <a:pPr algn="ctr" indent="0" marL="0">
+                        <a:buNone/>
+                      </a:pPr>
+                      <a:r>
+                        <a:rPr lang="en-US" sz="1250" b="1" dirty="0">
+                          <a:solidFill>
+                            <a:srgbClr val="4C72B0"/>
+                          </a:solidFill>
+                          <a:latin typeface="Calibri" pitchFamily="34" charset="0"/>
+                          <a:ea typeface="Calibri" pitchFamily="34" charset="-122"/>
+                          <a:cs typeface="Calibri" pitchFamily="34" charset="-120"/>
+                        </a:rPr>
+                        <a:t>6.82</a:t>
+                      </a:r>
+                      <a:endParaRPr lang="en-US" sz="1250" dirty="0">
+                        <a:latin typeface="Calibri" charset="0"/>
+                        <a:ea typeface="Calibri" charset="0"/>
+                        <a:cs typeface="Calibri" charset="0"/>
+                      </a:endParaRPr>
+                    </a:p>
+                  </a:txBody>
+                  <a:tcPr marL="91440" marR="91440" marT="45720" marB="45720" anchor="ctr">
+                    <a:lnL w="6350" cap="flat" cmpd="sng" algn="ctr">
+                      <a:solidFill>
+                        <a:srgbClr val="D6DBE8"/>
+                      </a:solidFill>
+                      <a:prstDash val="solid"/>
+                      <a:round/>
+                      <a:headEnd type="none" w="med" len="med"/>
+                      <a:tailEnd type="none" w="med" len="med"/>
+                    </a:lnL>
+                    <a:lnR w="6350" cap="flat" cmpd="sng" algn="ctr">
+                      <a:solidFill>
+                        <a:srgbClr val="D6DBE8"/>
+                      </a:solidFill>
+                      <a:prstDash val="solid"/>
+                      <a:round/>
+                      <a:headEnd type="none" w="med" len="med"/>
+                      <a:tailEnd type="none" w="med" len="med"/>
+                    </a:lnR>
+                    <a:lnT w="6350" cap="flat" cmpd="sng" algn="ctr">
+                      <a:solidFill>
+                        <a:srgbClr val="D6DBE8"/>
+                      </a:solidFill>
+                      <a:prstDash val="solid"/>
+                      <a:round/>
+                      <a:headEnd type="none" w="med" len="med"/>
+                      <a:tailEnd type="none" w="med" len="med"/>
+                    </a:lnT>
+                    <a:lnB w="6350" cap="flat" cmpd="sng" algn="ctr">
+                      <a:solidFill>
+                        <a:srgbClr val="D6DBE8"/>
+                      </a:solidFill>
+                      <a:prstDash val="solid"/>
+                      <a:round/>
+                      <a:headEnd type="none" w="med" len="med"/>
+                      <a:tailEnd type="none" w="med" len="med"/>
+                    </a:lnB>
+                  </a:tcPr>
+                </a:tc>
+                <a:tc>
+                  <a:txBody>
+                    <a:bodyPr/>
+                    <a:lstStyle/>
+                    <a:p>
+                      <a:pPr algn="ctr" indent="0" marL="0">
+                        <a:buNone/>
+                      </a:pPr>
+                      <a:r>
+                        <a:rPr lang="en-US" sz="1250" dirty="0">
+                          <a:solidFill>
+                            <a:srgbClr val="3B4A7A"/>
+                          </a:solidFill>
+                          <a:latin typeface="Calibri" pitchFamily="34" charset="0"/>
+                          <a:ea typeface="Calibri" pitchFamily="34" charset="-122"/>
+                          <a:cs typeface="Calibri" pitchFamily="34" charset="-120"/>
+                        </a:rPr>
+                        <a:t>4.82</a:t>
+                      </a:r>
+                      <a:endParaRPr lang="en-US" sz="1250" dirty="0">
+                        <a:latin typeface="Calibri" charset="0"/>
+                        <a:ea typeface="Calibri" charset="0"/>
+                        <a:cs typeface="Calibri" charset="0"/>
+                      </a:endParaRPr>
+                    </a:p>
+                  </a:txBody>
+                  <a:tcPr marL="91440" marR="91440" marT="45720" marB="45720" anchor="ctr">
+                    <a:lnL w="6350" cap="flat" cmpd="sng" algn="ctr">
+                      <a:solidFill>
+                        <a:srgbClr val="D6DBE8"/>
+                      </a:solidFill>
+                      <a:prstDash val="solid"/>
+                      <a:round/>
+                      <a:headEnd type="none" w="med" len="med"/>
+                      <a:tailEnd type="none" w="med" len="med"/>
+                    </a:lnL>
+                    <a:lnR w="6350" cap="flat" cmpd="sng" algn="ctr">
+                      <a:solidFill>
+                        <a:srgbClr val="D6DBE8"/>
+                      </a:solidFill>
+                      <a:prstDash val="solid"/>
+                      <a:round/>
+                      <a:headEnd type="none" w="med" len="med"/>
+                      <a:tailEnd type="none" w="med" len="med"/>
+                    </a:lnR>
+                    <a:lnT w="6350" cap="flat" cmpd="sng" algn="ctr">
+                      <a:solidFill>
+                        <a:srgbClr val="D6DBE8"/>
+                      </a:solidFill>
+                      <a:prstDash val="solid"/>
+                      <a:round/>
+                      <a:headEnd type="none" w="med" len="med"/>
+                      <a:tailEnd type="none" w="med" len="med"/>
+                    </a:lnT>
+                    <a:lnB w="6350" cap="flat" cmpd="sng" algn="ctr">
+                      <a:solidFill>
+                        <a:srgbClr val="D6DBE8"/>
+                      </a:solidFill>
+                      <a:prstDash val="solid"/>
+                      <a:round/>
+                      <a:headEnd type="none" w="med" len="med"/>
+                      <a:tailEnd type="none" w="med" len="med"/>
+                    </a:lnB>
+                  </a:tcPr>
+                </a:tc>
+                <a:tc>
+                  <a:txBody>
+                    <a:bodyPr/>
+                    <a:lstStyle/>
+                    <a:p>
+                      <a:pPr algn="ctr" indent="0" marL="0">
+                        <a:buNone/>
+                      </a:pPr>
+                      <a:r>
+                        <a:rPr lang="en-US" sz="1250" dirty="0">
+                          <a:solidFill>
+                            <a:srgbClr val="3B4A7A"/>
+                          </a:solidFill>
+                          <a:latin typeface="Calibri" pitchFamily="34" charset="0"/>
+                          <a:ea typeface="Calibri" pitchFamily="34" charset="-122"/>
+                          <a:cs typeface="Calibri" pitchFamily="34" charset="-120"/>
+                        </a:rPr>
+                        <a:t>24.50</a:t>
+                      </a:r>
+                      <a:endParaRPr lang="en-US" sz="1250" dirty="0">
+                        <a:latin typeface="Calibri" charset="0"/>
+                        <a:ea typeface="Calibri" charset="0"/>
+                        <a:cs typeface="Calibri" charset="0"/>
+                      </a:endParaRPr>
+                    </a:p>
+                  </a:txBody>
+                  <a:tcPr marL="91440" marR="91440" marT="45720" marB="45720" anchor="ctr">
+                    <a:lnL w="6350" cap="flat" cmpd="sng" algn="ctr">
+                      <a:solidFill>
+                        <a:srgbClr val="D6DBE8"/>
+                      </a:solidFill>
+                      <a:prstDash val="solid"/>
+                      <a:round/>
+                      <a:headEnd type="none" w="med" len="med"/>
+                      <a:tailEnd type="none" w="med" len="med"/>
+                    </a:lnL>
+                    <a:lnR w="6350" cap="flat" cmpd="sng" algn="ctr">
+                      <a:solidFill>
+                        <a:srgbClr val="D6DBE8"/>
+                      </a:solidFill>
+                      <a:prstDash val="solid"/>
+                      <a:round/>
+                      <a:headEnd type="none" w="med" len="med"/>
+                      <a:tailEnd type="none" w="med" len="med"/>
+                    </a:lnR>
+                    <a:lnT w="6350" cap="flat" cmpd="sng" algn="ctr">
+                      <a:solidFill>
+                        <a:srgbClr val="D6DBE8"/>
+                      </a:solidFill>
+                      <a:prstDash val="solid"/>
+                      <a:round/>
+                      <a:headEnd type="none" w="med" len="med"/>
+                      <a:tailEnd type="none" w="med" len="med"/>
+                    </a:lnT>
+                    <a:lnB w="6350" cap="flat" cmpd="sng" algn="ctr">
+                      <a:solidFill>
+                        <a:srgbClr val="D6DBE8"/>
+                      </a:solidFill>
+                      <a:prstDash val="solid"/>
+                      <a:round/>
+                      <a:headEnd type="none" w="med" len="med"/>
+                      <a:tailEnd type="none" w="med" len="med"/>
+                    </a:lnB>
+                  </a:tcPr>
+                </a:tc>
+                <a:tc>
+                  <a:txBody>
+                    <a:bodyPr/>
+                    <a:lstStyle/>
+                    <a:p>
+                      <a:pPr algn="ctr" indent="0" marL="0">
+                        <a:buNone/>
+                      </a:pPr>
+                      <a:r>
+                        <a:rPr lang="en-US" sz="1250" dirty="0">
+                          <a:solidFill>
+                            <a:srgbClr val="6B7280"/>
+                          </a:solidFill>
+                          <a:latin typeface="Calibri" pitchFamily="34" charset="0"/>
+                          <a:ea typeface="Calibri" pitchFamily="34" charset="-122"/>
+                          <a:cs typeface="Calibri" pitchFamily="34" charset="-120"/>
+                        </a:rPr>
+                        <a:t>—</a:t>
+                      </a:r>
+                      <a:endParaRPr lang="en-US" sz="1250" dirty="0">
+                        <a:latin typeface="Calibri" charset="0"/>
+                        <a:ea typeface="Calibri" charset="0"/>
+                        <a:cs typeface="Calibri" charset="0"/>
+                      </a:endParaRPr>
+                    </a:p>
+                  </a:txBody>
+                  <a:tcPr marL="91440" marR="91440" marT="45720" marB="45720" anchor="ctr">
+                    <a:lnL w="6350" cap="flat" cmpd="sng" algn="ctr">
+                      <a:solidFill>
+                        <a:srgbClr val="D6DBE8"/>
+                      </a:solidFill>
+                      <a:prstDash val="solid"/>
+                      <a:round/>
+                      <a:headEnd type="none" w="med" len="med"/>
+                      <a:tailEnd type="none" w="med" len="med"/>
+                    </a:lnL>
+                    <a:lnR w="6350" cap="flat" cmpd="sng" algn="ctr">
+                      <a:solidFill>
+                        <a:srgbClr val="D6DBE8"/>
+                      </a:solidFill>
+                      <a:prstDash val="solid"/>
+                      <a:round/>
+                      <a:headEnd type="none" w="med" len="med"/>
+                      <a:tailEnd type="none" w="med" len="med"/>
+                    </a:lnR>
+                    <a:lnT w="6350" cap="flat" cmpd="sng" algn="ctr">
+                      <a:solidFill>
+                        <a:srgbClr val="D6DBE8"/>
+                      </a:solidFill>
+                      <a:prstDash val="solid"/>
+                      <a:round/>
+                      <a:headEnd type="none" w="med" len="med"/>
+                      <a:tailEnd type="none" w="med" len="med"/>
+                    </a:lnT>
+                    <a:lnB w="6350" cap="flat" cmpd="sng" algn="ctr">
+                      <a:solidFill>
+                        <a:srgbClr val="D6DBE8"/>
+                      </a:solidFill>
+                      <a:prstDash val="solid"/>
+                      <a:round/>
+                      <a:headEnd type="none" w="med" len="med"/>
+                      <a:tailEnd type="none" w="med" len="med"/>
+                    </a:lnB>
+                  </a:tcPr>
+                </a:tc>
+              </a:tr>
+              <a:tr h="301752">
+                <a:tc>
+                  <a:txBody>
+                    <a:bodyPr/>
+                    <a:lstStyle/>
+                    <a:p>
+                      <a:pPr algn="l" indent="0" marL="0">
+                        <a:buNone/>
+                      </a:pPr>
+                      <a:r>
+                        <a:rPr lang="en-US" sz="1250" b="1" dirty="0">
+                          <a:solidFill>
+                            <a:srgbClr val="4C72B0"/>
+                          </a:solidFill>
+                          <a:latin typeface="Calibri" pitchFamily="34" charset="0"/>
+                          <a:ea typeface="Calibri" pitchFamily="34" charset="-122"/>
+                          <a:cs typeface="Calibri" pitchFamily="34" charset="-120"/>
+                        </a:rPr>
+                        <a:t>Single reversed LSTM</a:t>
+                      </a:r>
+                      <a:endParaRPr lang="en-US" sz="1250" dirty="0">
+                        <a:latin typeface="Calibri" charset="0"/>
+                        <a:ea typeface="Calibri" charset="0"/>
+                        <a:cs typeface="Calibri" charset="0"/>
+                      </a:endParaRPr>
+                    </a:p>
+                  </a:txBody>
+                  <a:tcPr marL="91440" marR="91440" marT="45720" marB="45720" anchor="ctr">
+                    <a:lnL w="6350" cap="flat" cmpd="sng" algn="ctr">
+                      <a:solidFill>
+                        <a:srgbClr val="D6DBE8"/>
+                      </a:solidFill>
+                      <a:prstDash val="solid"/>
+                      <a:round/>
+                      <a:headEnd type="none" w="med" len="med"/>
+                      <a:tailEnd type="none" w="med" len="med"/>
+                    </a:lnL>
+                    <a:lnR w="6350" cap="flat" cmpd="sng" algn="ctr">
+                      <a:solidFill>
+                        <a:srgbClr val="D6DBE8"/>
+                      </a:solidFill>
+                      <a:prstDash val="solid"/>
+                      <a:round/>
+                      <a:headEnd type="none" w="med" len="med"/>
+                      <a:tailEnd type="none" w="med" len="med"/>
+                    </a:lnR>
+                    <a:lnT w="6350" cap="flat" cmpd="sng" algn="ctr">
+                      <a:solidFill>
+                        <a:srgbClr val="D6DBE8"/>
+                      </a:solidFill>
+                      <a:prstDash val="solid"/>
+                      <a:round/>
+                      <a:headEnd type="none" w="med" len="med"/>
+                      <a:tailEnd type="none" w="med" len="med"/>
+                    </a:lnT>
+                    <a:lnB w="6350" cap="flat" cmpd="sng" algn="ctr">
+                      <a:solidFill>
+                        <a:srgbClr val="D6DBE8"/>
+                      </a:solidFill>
+                      <a:prstDash val="solid"/>
+                      <a:round/>
+                      <a:headEnd type="none" w="med" len="med"/>
+                      <a:tailEnd type="none" w="med" len="med"/>
+                    </a:lnB>
+                  </a:tcPr>
+                </a:tc>
+                <a:tc>
+                  <a:txBody>
+                    <a:bodyPr/>
+                    <a:lstStyle/>
+                    <a:p>
+                      <a:pPr algn="ctr" indent="0" marL="0">
+                        <a:buNone/>
+                      </a:pPr>
+                      <a:r>
+                        <a:rPr lang="en-US" sz="1250" dirty="0">
+                          <a:solidFill>
+                            <a:srgbClr val="3B4A7A"/>
+                          </a:solidFill>
+                          <a:latin typeface="Calibri" pitchFamily="34" charset="0"/>
+                          <a:ea typeface="Calibri" pitchFamily="34" charset="-122"/>
+                          <a:cs typeface="Calibri" pitchFamily="34" charset="-120"/>
+                        </a:rPr>
+                        <a:t>12</a:t>
+                      </a:r>
+                      <a:endParaRPr lang="en-US" sz="1250" dirty="0">
+                        <a:latin typeface="Calibri" charset="0"/>
+                        <a:ea typeface="Calibri" charset="0"/>
+                        <a:cs typeface="Calibri" charset="0"/>
+                      </a:endParaRPr>
+                    </a:p>
+                  </a:txBody>
+                  <a:tcPr marL="91440" marR="91440" marT="45720" marB="45720" anchor="ctr">
+                    <a:lnL w="6350" cap="flat" cmpd="sng" algn="ctr">
+                      <a:solidFill>
+                        <a:srgbClr val="D6DBE8"/>
+                      </a:solidFill>
+                      <a:prstDash val="solid"/>
+                      <a:round/>
+                      <a:headEnd type="none" w="med" len="med"/>
+                      <a:tailEnd type="none" w="med" len="med"/>
+                    </a:lnL>
+                    <a:lnR w="6350" cap="flat" cmpd="sng" algn="ctr">
+                      <a:solidFill>
+                        <a:srgbClr val="D6DBE8"/>
+                      </a:solidFill>
+                      <a:prstDash val="solid"/>
+                      <a:round/>
+                      <a:headEnd type="none" w="med" len="med"/>
+                      <a:tailEnd type="none" w="med" len="med"/>
+                    </a:lnR>
+                    <a:lnT w="6350" cap="flat" cmpd="sng" algn="ctr">
+                      <a:solidFill>
+                        <a:srgbClr val="D6DBE8"/>
+                      </a:solidFill>
+                      <a:prstDash val="solid"/>
+                      <a:round/>
+                      <a:headEnd type="none" w="med" len="med"/>
+                      <a:tailEnd type="none" w="med" len="med"/>
+                    </a:lnT>
+                    <a:lnB w="6350" cap="flat" cmpd="sng" algn="ctr">
+                      <a:solidFill>
+                        <a:srgbClr val="D6DBE8"/>
+                      </a:solidFill>
+                      <a:prstDash val="solid"/>
+                      <a:round/>
+                      <a:headEnd type="none" w="med" len="med"/>
+                      <a:tailEnd type="none" w="med" len="med"/>
+                    </a:lnB>
+                  </a:tcPr>
+                </a:tc>
+                <a:tc>
+                  <a:txBody>
+                    <a:bodyPr/>
+                    <a:lstStyle/>
+                    <a:p>
+                      <a:pPr algn="ctr" indent="0" marL="0">
+                        <a:buNone/>
+                      </a:pPr>
+                      <a:r>
+                        <a:rPr lang="en-US" sz="1250" b="1" dirty="0">
+                          <a:solidFill>
+                            <a:srgbClr val="4C72B0"/>
+                          </a:solidFill>
+                          <a:latin typeface="Calibri" pitchFamily="34" charset="0"/>
+                          <a:ea typeface="Calibri" pitchFamily="34" charset="-122"/>
+                          <a:cs typeface="Calibri" pitchFamily="34" charset="-120"/>
+                        </a:rPr>
+                        <a:t>6.60</a:t>
+                      </a:r>
+                      <a:endParaRPr lang="en-US" sz="1250" dirty="0">
+                        <a:latin typeface="Calibri" charset="0"/>
+                        <a:ea typeface="Calibri" charset="0"/>
+                        <a:cs typeface="Calibri" charset="0"/>
+                      </a:endParaRPr>
+                    </a:p>
+                  </a:txBody>
+                  <a:tcPr marL="91440" marR="91440" marT="45720" marB="45720" anchor="ctr">
+                    <a:lnL w="6350" cap="flat" cmpd="sng" algn="ctr">
+                      <a:solidFill>
+                        <a:srgbClr val="D6DBE8"/>
+                      </a:solidFill>
+                      <a:prstDash val="solid"/>
+                      <a:round/>
+                      <a:headEnd type="none" w="med" len="med"/>
+                      <a:tailEnd type="none" w="med" len="med"/>
+                    </a:lnL>
+                    <a:lnR w="6350" cap="flat" cmpd="sng" algn="ctr">
+                      <a:solidFill>
+                        <a:srgbClr val="D6DBE8"/>
+                      </a:solidFill>
+                      <a:prstDash val="solid"/>
+                      <a:round/>
+                      <a:headEnd type="none" w="med" len="med"/>
+                      <a:tailEnd type="none" w="med" len="med"/>
+                    </a:lnR>
+                    <a:lnT w="6350" cap="flat" cmpd="sng" algn="ctr">
+                      <a:solidFill>
+                        <a:srgbClr val="D6DBE8"/>
+                      </a:solidFill>
+                      <a:prstDash val="solid"/>
+                      <a:round/>
+                      <a:headEnd type="none" w="med" len="med"/>
+                      <a:tailEnd type="none" w="med" len="med"/>
+                    </a:lnT>
+                    <a:lnB w="6350" cap="flat" cmpd="sng" algn="ctr">
+                      <a:solidFill>
+                        <a:srgbClr val="D6DBE8"/>
+                      </a:solidFill>
+                      <a:prstDash val="solid"/>
+                      <a:round/>
+                      <a:headEnd type="none" w="med" len="med"/>
+                      <a:tailEnd type="none" w="med" len="med"/>
+                    </a:lnB>
+                  </a:tcPr>
+                </a:tc>
+                <a:tc>
+                  <a:txBody>
+                    <a:bodyPr/>
+                    <a:lstStyle/>
+                    <a:p>
+                      <a:pPr algn="ctr" indent="0" marL="0">
+                        <a:buNone/>
+                      </a:pPr>
+                      <a:r>
+                        <a:rPr lang="en-US" sz="1250" dirty="0">
+                          <a:solidFill>
+                            <a:srgbClr val="3B4A7A"/>
+                          </a:solidFill>
+                          <a:latin typeface="Calibri" pitchFamily="34" charset="0"/>
+                          <a:ea typeface="Calibri" pitchFamily="34" charset="-122"/>
+                          <a:cs typeface="Calibri" pitchFamily="34" charset="-120"/>
+                        </a:rPr>
+                        <a:t>4.77</a:t>
+                      </a:r>
+                      <a:endParaRPr lang="en-US" sz="1250" dirty="0">
+                        <a:latin typeface="Calibri" charset="0"/>
+                        <a:ea typeface="Calibri" charset="0"/>
+                        <a:cs typeface="Calibri" charset="0"/>
+                      </a:endParaRPr>
+                    </a:p>
+                  </a:txBody>
+                  <a:tcPr marL="91440" marR="91440" marT="45720" marB="45720" anchor="ctr">
+                    <a:lnL w="6350" cap="flat" cmpd="sng" algn="ctr">
+                      <a:solidFill>
+                        <a:srgbClr val="D6DBE8"/>
+                      </a:solidFill>
+                      <a:prstDash val="solid"/>
+                      <a:round/>
+                      <a:headEnd type="none" w="med" len="med"/>
+                      <a:tailEnd type="none" w="med" len="med"/>
+                    </a:lnL>
+                    <a:lnR w="6350" cap="flat" cmpd="sng" algn="ctr">
+                      <a:solidFill>
+                        <a:srgbClr val="D6DBE8"/>
+                      </a:solidFill>
+                      <a:prstDash val="solid"/>
+                      <a:round/>
+                      <a:headEnd type="none" w="med" len="med"/>
+                      <a:tailEnd type="none" w="med" len="med"/>
+                    </a:lnR>
+                    <a:lnT w="6350" cap="flat" cmpd="sng" algn="ctr">
+                      <a:solidFill>
+                        <a:srgbClr val="D6DBE8"/>
+                      </a:solidFill>
+                      <a:prstDash val="solid"/>
+                      <a:round/>
+                      <a:headEnd type="none" w="med" len="med"/>
+                      <a:tailEnd type="none" w="med" len="med"/>
+                    </a:lnT>
+                    <a:lnB w="6350" cap="flat" cmpd="sng" algn="ctr">
+                      <a:solidFill>
+                        <a:srgbClr val="D6DBE8"/>
+                      </a:solidFill>
+                      <a:prstDash val="solid"/>
+                      <a:round/>
+                      <a:headEnd type="none" w="med" len="med"/>
+                      <a:tailEnd type="none" w="med" len="med"/>
+                    </a:lnB>
+                  </a:tcPr>
+                </a:tc>
+                <a:tc>
+                  <a:txBody>
+                    <a:bodyPr/>
+                    <a:lstStyle/>
+                    <a:p>
+                      <a:pPr algn="ctr" indent="0" marL="0">
+                        <a:buNone/>
+                      </a:pPr>
+                      <a:r>
+                        <a:rPr lang="en-US" sz="1250" dirty="0">
+                          <a:solidFill>
+                            <a:srgbClr val="3B4A7A"/>
+                          </a:solidFill>
+                          <a:latin typeface="Calibri" pitchFamily="34" charset="0"/>
+                          <a:ea typeface="Calibri" pitchFamily="34" charset="-122"/>
+                          <a:cs typeface="Calibri" pitchFamily="34" charset="-120"/>
+                        </a:rPr>
+                        <a:t>24.50</a:t>
+                      </a:r>
+                      <a:endParaRPr lang="en-US" sz="1250" dirty="0">
+                        <a:latin typeface="Calibri" charset="0"/>
+                        <a:ea typeface="Calibri" charset="0"/>
+                        <a:cs typeface="Calibri" charset="0"/>
+                      </a:endParaRPr>
+                    </a:p>
+                  </a:txBody>
+                  <a:tcPr marL="91440" marR="91440" marT="45720" marB="45720" anchor="ctr">
+                    <a:lnL w="6350" cap="flat" cmpd="sng" algn="ctr">
+                      <a:solidFill>
+                        <a:srgbClr val="D6DBE8"/>
+                      </a:solidFill>
+                      <a:prstDash val="solid"/>
+                      <a:round/>
+                      <a:headEnd type="none" w="med" len="med"/>
+                      <a:tailEnd type="none" w="med" len="med"/>
+                    </a:lnL>
+                    <a:lnR w="6350" cap="flat" cmpd="sng" algn="ctr">
+                      <a:solidFill>
+                        <a:srgbClr val="D6DBE8"/>
+                      </a:solidFill>
+                      <a:prstDash val="solid"/>
+                      <a:round/>
+                      <a:headEnd type="none" w="med" len="med"/>
+                      <a:tailEnd type="none" w="med" len="med"/>
+                    </a:lnR>
+                    <a:lnT w="6350" cap="flat" cmpd="sng" algn="ctr">
+                      <a:solidFill>
+                        <a:srgbClr val="D6DBE8"/>
+                      </a:solidFill>
+                      <a:prstDash val="solid"/>
+                      <a:round/>
+                      <a:headEnd type="none" w="med" len="med"/>
+                      <a:tailEnd type="none" w="med" len="med"/>
+                    </a:lnT>
+                    <a:lnB w="6350" cap="flat" cmpd="sng" algn="ctr">
+                      <a:solidFill>
+                        <a:srgbClr val="D6DBE8"/>
+                      </a:solidFill>
+                      <a:prstDash val="solid"/>
+                      <a:round/>
+                      <a:headEnd type="none" w="med" len="med"/>
+                      <a:tailEnd type="none" w="med" len="med"/>
+                    </a:lnB>
+                  </a:tcPr>
+                </a:tc>
+                <a:tc>
+                  <a:txBody>
+                    <a:bodyPr/>
+                    <a:lstStyle/>
+                    <a:p>
+                      <a:pPr algn="ctr" indent="0" marL="0">
+                        <a:buNone/>
+                      </a:pPr>
+                      <a:r>
+                        <a:rPr lang="en-US" sz="1250" dirty="0">
+                          <a:solidFill>
+                            <a:srgbClr val="6B7280"/>
+                          </a:solidFill>
+                          <a:latin typeface="Calibri" pitchFamily="34" charset="0"/>
+                          <a:ea typeface="Calibri" pitchFamily="34" charset="-122"/>
+                          <a:cs typeface="Calibri" pitchFamily="34" charset="-120"/>
+                        </a:rPr>
+                        <a:t>30.59</a:t>
+                      </a:r>
+                      <a:endParaRPr lang="en-US" sz="1250" dirty="0">
+                        <a:latin typeface="Calibri" charset="0"/>
+                        <a:ea typeface="Calibri" charset="0"/>
+                        <a:cs typeface="Calibri" charset="0"/>
+                      </a:endParaRPr>
+                    </a:p>
+                  </a:txBody>
+                  <a:tcPr marL="91440" marR="91440" marT="45720" marB="45720" anchor="ctr">
+                    <a:lnL w="6350" cap="flat" cmpd="sng" algn="ctr">
+                      <a:solidFill>
+                        <a:srgbClr val="D6DBE8"/>
+                      </a:solidFill>
+                      <a:prstDash val="solid"/>
+                      <a:round/>
+                      <a:headEnd type="none" w="med" len="med"/>
+                      <a:tailEnd type="none" w="med" len="med"/>
+                    </a:lnL>
+                    <a:lnR w="6350" cap="flat" cmpd="sng" algn="ctr">
+                      <a:solidFill>
+                        <a:srgbClr val="D6DBE8"/>
+                      </a:solidFill>
+                      <a:prstDash val="solid"/>
+                      <a:round/>
+                      <a:headEnd type="none" w="med" len="med"/>
+                      <a:tailEnd type="none" w="med" len="med"/>
+                    </a:lnR>
+                    <a:lnT w="6350" cap="flat" cmpd="sng" algn="ctr">
+                      <a:solidFill>
+                        <a:srgbClr val="D6DBE8"/>
+                      </a:solidFill>
+                      <a:prstDash val="solid"/>
+                      <a:round/>
+                      <a:headEnd type="none" w="med" len="med"/>
+                      <a:tailEnd type="none" w="med" len="med"/>
+                    </a:lnT>
+                    <a:lnB w="6350" cap="flat" cmpd="sng" algn="ctr">
+                      <a:solidFill>
+                        <a:srgbClr val="D6DBE8"/>
+                      </a:solidFill>
+                      <a:prstDash val="solid"/>
+                      <a:round/>
+                      <a:headEnd type="none" w="med" len="med"/>
+                      <a:tailEnd type="none" w="med" len="med"/>
+                    </a:lnB>
+                  </a:tcPr>
+                </a:tc>
+              </a:tr>
+            </a:tbl>
+          </a:graphicData>
+        </a:graphic>
+      </p:graphicFrame>
+      <p:sp>
+        <p:nvSpPr>
+          <p:cNvPr id="5" name="Shape 2"/>
+          <p:cNvSpPr/>
+          <p:nvPr/>
+        </p:nvSpPr>
+        <p:spPr>
+          <a:xfrm>
+            <a:off x="548640" y="4160520"/>
+            <a:ext cx="3566160" cy="1481328"/>
+          </a:xfrm>
+          <a:prstGeom prst="roundRect">
+            <a:avLst>
+              <a:gd name="adj" fmla="val 5556"/>
+            </a:avLst>
+          </a:prstGeom>
+          <a:solidFill>
+            <a:srgbClr val="EEF1F8"/>
+          </a:solidFill>
+          <a:ln w="12700">
+            <a:solidFill>
+              <a:srgbClr val="EEF1F8"/>
+            </a:solidFill>
+            <a:prstDash val="solid"/>
+          </a:ln>
+        </p:spPr>
+      </p:sp>
+      <p:sp>
+        <p:nvSpPr>
+          <p:cNvPr id="6" name="Text 3"/>
           <p:cNvSpPr txBox="1"/>
           <p:nvPr/>
         </p:nvSpPr>
         <p:spPr>
           <a:xfrm>
-            <a:off x="548640" y="1554480"/>
-            <a:ext cx="11064240" cy="4206240"/>
+            <a:off x="548640" y="4306824"/>
+            <a:ext cx="3566160" cy="786384"/>
           </a:xfrm>
           <a:prstGeom prst="rect">
             <a:avLst/>
@@ -5700,18 +8523,53 @@
           <a:ln/>
         </p:spPr>
         <p:txBody>
-          <a:bodyPr wrap="square" lIns="0" tIns="0" rIns="0" bIns="0" rtlCol="0" anchor="t"/>
-          <a:lstStyle/>
-          <a:p>
-            <a:pPr marL="342900" indent="-342900">
-              <a:spcAft>
-                <a:spcPts val="900"/>
-              </a:spcAft>
-              <a:buSzPct val="100000"/>
-              <a:buChar char="•"/>
-            </a:pPr>
-            <a:r>
-              <a:rPr lang="en-US" sz="1500" dirty="0">
+          <a:bodyPr wrap="square" lIns="0" tIns="0" rIns="0" bIns="0" rtlCol="0" anchor="ctr"/>
+          <a:lstStyle/>
+          <a:p>
+            <a:pPr algn="ctr" indent="0" marL="0">
+              <a:buNone/>
+            </a:pPr>
+            <a:r>
+              <a:rPr lang="en-US" sz="4000" b="1" dirty="0">
+                <a:solidFill>
+                  <a:srgbClr val="4C72B0"/>
+                </a:solidFill>
+                <a:latin typeface="Cambria" pitchFamily="34" charset="0"/>
+                <a:ea typeface="Cambria" pitchFamily="34" charset="-122"/>
+                <a:cs typeface="Cambria" pitchFamily="34" charset="-120"/>
+              </a:rPr>
+              <a:t>+2.71</a:t>
+            </a:r>
+            <a:endParaRPr lang="en-US" sz="4000" dirty="0"/>
+          </a:p>
+        </p:txBody>
+      </p:sp>
+      <p:sp>
+        <p:nvSpPr>
+          <p:cNvPr id="7" name="Text 4"/>
+          <p:cNvSpPr txBox="1"/>
+          <p:nvPr/>
+        </p:nvSpPr>
+        <p:spPr>
+          <a:xfrm>
+            <a:off x="658368" y="5102352"/>
+            <a:ext cx="3346704" cy="457200"/>
+          </a:xfrm>
+          <a:prstGeom prst="rect">
+            <a:avLst/>
+          </a:prstGeom>
+          <a:noFill/>
+          <a:ln/>
+        </p:spPr>
+        <p:txBody>
+          <a:bodyPr wrap="square" lIns="0" tIns="0" rIns="0" bIns="0" rtlCol="0" anchor="ctr"/>
+          <a:lstStyle/>
+          <a:p>
+            <a:pPr algn="ctr" indent="0" marL="0">
+              <a:buNone/>
+            </a:pPr>
+            <a:r>
+              <a:rPr lang="en-US" sz="1150" dirty="0">
                 <a:solidFill>
                   <a:srgbClr val="3B4A7A"/>
                 </a:solidFill>
@@ -5719,15 +8577,276 @@
                 <a:ea typeface="Calibri" pitchFamily="34" charset="-122"/>
                 <a:cs typeface="Calibri" pitchFamily="34" charset="-120"/>
               </a:rPr>
-              <a:t>WMT'14 runs still training — regenerate with `make results-wmt &amp;&amp; node scripts/make_slides.js`.</a:t>
-            </a:r>
-            <a:endParaRPr lang="en-US" sz="1500" dirty="0"/>
-          </a:p>
-        </p:txBody>
-      </p:sp>
-      <p:sp>
-        <p:nvSpPr>
-          <p:cNvPr id="5" name="Text 3"/>
+              <a:t>BLEU from reversal alone</a:t>
+            </a:r>
+            <a:endParaRPr lang="en-US" sz="1150" dirty="0"/>
+          </a:p>
+          <a:p>
+            <a:pPr algn="ctr" indent="0" marL="0">
+              <a:buNone/>
+            </a:pPr>
+            <a:r>
+              <a:rPr lang="en-US" sz="1150" dirty="0">
+                <a:solidFill>
+                  <a:srgbClr val="3B4A7A"/>
+                </a:solidFill>
+                <a:latin typeface="Calibri" pitchFamily="34" charset="0"/>
+                <a:ea typeface="Calibri" pitchFamily="34" charset="-122"/>
+                <a:cs typeface="Calibri" pitchFamily="34" charset="-120"/>
+              </a:rPr>
+              <a:t>(paper: +4.42)</a:t>
+            </a:r>
+            <a:endParaRPr lang="en-US" sz="1150" dirty="0"/>
+          </a:p>
+        </p:txBody>
+      </p:sp>
+      <p:sp>
+        <p:nvSpPr>
+          <p:cNvPr id="8" name="Shape 5"/>
+          <p:cNvSpPr/>
+          <p:nvPr/>
+        </p:nvSpPr>
+        <p:spPr>
+          <a:xfrm>
+            <a:off x="4434840" y="4160520"/>
+            <a:ext cx="3566160" cy="1481328"/>
+          </a:xfrm>
+          <a:prstGeom prst="roundRect">
+            <a:avLst>
+              <a:gd name="adj" fmla="val 5556"/>
+            </a:avLst>
+          </a:prstGeom>
+          <a:solidFill>
+            <a:srgbClr val="EEF1F8"/>
+          </a:solidFill>
+          <a:ln w="12700">
+            <a:solidFill>
+              <a:srgbClr val="EEF1F8"/>
+            </a:solidFill>
+            <a:prstDash val="solid"/>
+          </a:ln>
+        </p:spPr>
+      </p:sp>
+      <p:sp>
+        <p:nvSpPr>
+          <p:cNvPr id="9" name="Text 6"/>
+          <p:cNvSpPr txBox="1"/>
+          <p:nvPr/>
+        </p:nvSpPr>
+        <p:spPr>
+          <a:xfrm>
+            <a:off x="4434840" y="4306824"/>
+            <a:ext cx="3566160" cy="786384"/>
+          </a:xfrm>
+          <a:prstGeom prst="rect">
+            <a:avLst/>
+          </a:prstGeom>
+          <a:noFill/>
+          <a:ln/>
+        </p:spPr>
+        <p:txBody>
+          <a:bodyPr wrap="square" lIns="0" tIns="0" rIns="0" bIns="0" rtlCol="0" anchor="ctr"/>
+          <a:lstStyle/>
+          <a:p>
+            <a:pPr algn="ctr" indent="0" marL="0">
+              <a:buNone/>
+            </a:pPr>
+            <a:r>
+              <a:rPr lang="en-US" sz="4000" b="1" dirty="0">
+                <a:solidFill>
+                  <a:srgbClr val="4C72B0"/>
+                </a:solidFill>
+                <a:latin typeface="Cambria" pitchFamily="34" charset="0"/>
+                <a:ea typeface="Cambria" pitchFamily="34" charset="-122"/>
+                <a:cs typeface="Cambria" pitchFamily="34" charset="-120"/>
+              </a:rPr>
+              <a:t>25%</a:t>
+            </a:r>
+            <a:endParaRPr lang="en-US" sz="4000" dirty="0"/>
+          </a:p>
+        </p:txBody>
+      </p:sp>
+      <p:sp>
+        <p:nvSpPr>
+          <p:cNvPr id="10" name="Text 7"/>
+          <p:cNvSpPr txBox="1"/>
+          <p:nvPr/>
+        </p:nvSpPr>
+        <p:spPr>
+          <a:xfrm>
+            <a:off x="4544568" y="5102352"/>
+            <a:ext cx="3346704" cy="457200"/>
+          </a:xfrm>
+          <a:prstGeom prst="rect">
+            <a:avLst/>
+          </a:prstGeom>
+          <a:noFill/>
+          <a:ln/>
+        </p:spPr>
+        <p:txBody>
+          <a:bodyPr wrap="square" lIns="0" tIns="0" rIns="0" bIns="0" rtlCol="0" anchor="ctr"/>
+          <a:lstStyle/>
+          <a:p>
+            <a:pPr algn="ctr" indent="0" marL="0">
+              <a:buNone/>
+            </a:pPr>
+            <a:r>
+              <a:rPr lang="en-US" sz="1150" dirty="0">
+                <a:solidFill>
+                  <a:srgbClr val="3B4A7A"/>
+                </a:solidFill>
+                <a:latin typeface="Calibri" pitchFamily="34" charset="0"/>
+                <a:ea typeface="Calibri" pitchFamily="34" charset="-122"/>
+                <a:cs typeface="Calibri" pitchFamily="34" charset="-120"/>
+              </a:rPr>
+              <a:t>lower test perplexity</a:t>
+            </a:r>
+            <a:endParaRPr lang="en-US" sz="1150" dirty="0"/>
+          </a:p>
+          <a:p>
+            <a:pPr algn="ctr" indent="0" marL="0">
+              <a:buNone/>
+            </a:pPr>
+            <a:r>
+              <a:rPr lang="en-US" sz="1150" dirty="0">
+                <a:solidFill>
+                  <a:srgbClr val="3B4A7A"/>
+                </a:solidFill>
+                <a:latin typeface="Calibri" pitchFamily="34" charset="0"/>
+                <a:ea typeface="Calibri" pitchFamily="34" charset="-122"/>
+                <a:cs typeface="Calibri" pitchFamily="34" charset="-120"/>
+              </a:rPr>
+              <a:t>(paper: 19%)</a:t>
+            </a:r>
+            <a:endParaRPr lang="en-US" sz="1150" dirty="0"/>
+          </a:p>
+        </p:txBody>
+      </p:sp>
+      <p:sp>
+        <p:nvSpPr>
+          <p:cNvPr id="11" name="Shape 8"/>
+          <p:cNvSpPr/>
+          <p:nvPr/>
+        </p:nvSpPr>
+        <p:spPr>
+          <a:xfrm>
+            <a:off x="8321040" y="4160520"/>
+            <a:ext cx="3566160" cy="1481328"/>
+          </a:xfrm>
+          <a:prstGeom prst="roundRect">
+            <a:avLst>
+              <a:gd name="adj" fmla="val 5556"/>
+            </a:avLst>
+          </a:prstGeom>
+          <a:solidFill>
+            <a:srgbClr val="EEF1F8"/>
+          </a:solidFill>
+          <a:ln w="12700">
+            <a:solidFill>
+              <a:srgbClr val="EEF1F8"/>
+            </a:solidFill>
+            <a:prstDash val="solid"/>
+          </a:ln>
+        </p:spPr>
+      </p:sp>
+      <p:sp>
+        <p:nvSpPr>
+          <p:cNvPr id="12" name="Text 9"/>
+          <p:cNvSpPr txBox="1"/>
+          <p:nvPr/>
+        </p:nvSpPr>
+        <p:spPr>
+          <a:xfrm>
+            <a:off x="8321040" y="4306824"/>
+            <a:ext cx="3566160" cy="786384"/>
+          </a:xfrm>
+          <a:prstGeom prst="rect">
+            <a:avLst/>
+          </a:prstGeom>
+          <a:noFill/>
+          <a:ln/>
+        </p:spPr>
+        <p:txBody>
+          <a:bodyPr wrap="square" lIns="0" tIns="0" rIns="0" bIns="0" rtlCol="0" anchor="ctr"/>
+          <a:lstStyle/>
+          <a:p>
+            <a:pPr algn="ctr" indent="0" marL="0">
+              <a:buNone/>
+            </a:pPr>
+            <a:r>
+              <a:rPr lang="en-US" sz="4000" b="1" dirty="0">
+                <a:solidFill>
+                  <a:srgbClr val="3B4A7A"/>
+                </a:solidFill>
+                <a:latin typeface="Cambria" pitchFamily="34" charset="0"/>
+                <a:ea typeface="Cambria" pitchFamily="34" charset="-122"/>
+                <a:cs typeface="Cambria" pitchFamily="34" charset="-120"/>
+              </a:rPr>
+              <a:t>ntst14</a:t>
+            </a:r>
+            <a:endParaRPr lang="en-US" sz="4000" dirty="0"/>
+          </a:p>
+        </p:txBody>
+      </p:sp>
+      <p:sp>
+        <p:nvSpPr>
+          <p:cNvPr id="13" name="Text 10"/>
+          <p:cNvSpPr txBox="1"/>
+          <p:nvPr/>
+        </p:nvSpPr>
+        <p:spPr>
+          <a:xfrm>
+            <a:off x="8430768" y="5102352"/>
+            <a:ext cx="3346704" cy="457200"/>
+          </a:xfrm>
+          <a:prstGeom prst="rect">
+            <a:avLst/>
+          </a:prstGeom>
+          <a:noFill/>
+          <a:ln/>
+        </p:spPr>
+        <p:txBody>
+          <a:bodyPr wrap="square" lIns="0" tIns="0" rIns="0" bIns="0" rtlCol="0" anchor="ctr"/>
+          <a:lstStyle/>
+          <a:p>
+            <a:pPr algn="ctr" indent="0" marL="0">
+              <a:buNone/>
+            </a:pPr>
+            <a:r>
+              <a:rPr lang="en-US" sz="1150" dirty="0">
+                <a:solidFill>
+                  <a:srgbClr val="3B4A7A"/>
+                </a:solidFill>
+                <a:latin typeface="Calibri" pitchFamily="34" charset="0"/>
+                <a:ea typeface="Calibri" pitchFamily="34" charset="-122"/>
+                <a:cs typeface="Calibri" pitchFamily="34" charset="-120"/>
+              </a:rPr>
+              <a:t>scored on the paper's own</a:t>
+            </a:r>
+            <a:endParaRPr lang="en-US" sz="1150" dirty="0"/>
+          </a:p>
+          <a:p>
+            <a:pPr algn="ctr" indent="0" marL="0">
+              <a:buNone/>
+            </a:pPr>
+            <a:r>
+              <a:rPr lang="en-US" sz="1150" dirty="0">
+                <a:solidFill>
+                  <a:srgbClr val="3B4A7A"/>
+                </a:solidFill>
+                <a:latin typeface="Calibri" pitchFamily="34" charset="0"/>
+                <a:ea typeface="Calibri" pitchFamily="34" charset="-122"/>
+                <a:cs typeface="Calibri" pitchFamily="34" charset="-120"/>
+              </a:rPr>
+              <a:t>3003-sentence test set</a:t>
+            </a:r>
+            <a:endParaRPr lang="en-US" sz="1150" dirty="0"/>
+          </a:p>
+        </p:txBody>
+      </p:sp>
+      <p:sp>
+        <p:nvSpPr>
+          <p:cNvPr id="14" name="Text 11"/>
           <p:cNvSpPr txBox="1"/>
           <p:nvPr/>
         </p:nvSpPr>
@@ -5869,7 +8988,7 @@
       </p:sp>
       <p:pic>
         <p:nvPicPr>
-          <p:cNvPr id="4" name="Image 0" descr="/Users/rubenstalin/Library/Mobile Documents/com~apple~CloudDocs/Sem 7/Intro to ML/seq2seq-ee5180/results/multi30k/beam_sweep.png">    </p:cNvPr>
+          <p:cNvPr id="4" name="Image 0" descr="/Users/rubenstalin/Library/Mobile Documents/com~apple~CloudDocs/Sem 7/Intro to ML/seq2seq-ee5180/results/wmt14_small/beam_sweep.png">    </p:cNvPr>
           <p:cNvPicPr>
             <a:picLocks noChangeAspect="1"/>
           </p:cNvPicPr>
@@ -5893,7 +9012,7 @@
       </p:pic>
       <p:pic>
         <p:nvPicPr>
-          <p:cNvPr id="5" name="Image 1" descr="/Users/rubenstalin/Library/Mobile Documents/com~apple~CloudDocs/Sem 7/Intro to ML/seq2seq-ee5180/results/multi30k/bleu_by_length.png">    </p:cNvPr>
+          <p:cNvPr id="5" name="Image 1" descr="/Users/rubenstalin/Library/Mobile Documents/com~apple~CloudDocs/Sem 7/Intro to ML/seq2seq-ee5180/results/wmt14_small/bleu_by_length.png">    </p:cNvPr>
           <p:cNvPicPr>
             <a:picLocks noChangeAspect="1"/>
           </p:cNvPicPr>
@@ -5948,7 +9067,7 @@
                 <a:ea typeface="Calibri" pitchFamily="34" charset="-122"/>
                 <a:cs typeface="Calibri" pitchFamily="34" charset="-120"/>
               </a:rPr>
-              <a:t>Beam 2 recovers 93% of the gain from beam 1 to beam 12 — reproducing the paper's observation that "a beam of size 2 provides most of the benefits of beam search".</a:t>
+              <a:t>Beam 2 recovers 216% of the gain from beam 1 to beam 12 — reproducing the paper's observation that "a beam of size 2 provides most of the benefits of beam search".</a:t>
             </a:r>
             <a:endParaRPr lang="en-US" sz="1400" dirty="0"/>
           </a:p>
@@ -5987,7 +9106,7 @@
                 <a:ea typeface="Calibri" pitchFamily="34" charset="-122"/>
                 <a:cs typeface="Calibri" pitchFamily="34" charset="-120"/>
               </a:rPr>
-              <a:t>Shown on Multi30k while the WMT runs finish.</a:t>
+              <a:t>Right-hand panel is our analogue of the paper's Fig. 3.</a:t>
             </a:r>
             <a:endParaRPr lang="en-US" sz="1050" dirty="0"/>
           </a:p>

--- a/slides/EE5180_midterm_slides.pptx
+++ b/slides/EE5180_midterm_slides.pptx
@@ -2146,7 +2146,7 @@
                 <a:ea typeface="Calibri" pitchFamily="34" charset="-122"/>
                 <a:cs typeface="Calibri" pitchFamily="34" charset="-120"/>
               </a:rPr>
-              <a:t>Correctness gates (pytest, ~12 s)</a:t>
+              <a:t>Correctness gates (23 tests, ~3 s)</a:t>
             </a:r>
             <a:endParaRPr lang="en-US" sz="1600" dirty="0"/>
           </a:p>
@@ -2700,11 +2700,11 @@
         <p:spPr>
           <a:xfrm>
             <a:off x="548640" y="1600200"/>
-            <a:ext cx="5349240" cy="3566160"/>
+            <a:ext cx="5349240" cy="2788920"/>
           </a:xfrm>
           <a:prstGeom prst="roundRect">
             <a:avLst>
-              <a:gd name="adj" fmla="val 2308"/>
+              <a:gd name="adj" fmla="val 2951"/>
             </a:avLst>
           </a:prstGeom>
           <a:solidFill>
@@ -2766,7 +2766,7 @@
         <p:spPr>
           <a:xfrm>
             <a:off x="777240" y="2240280"/>
-            <a:ext cx="4892040" cy="2743200"/>
+            <a:ext cx="4892040" cy="2011680"/>
           </a:xfrm>
           <a:prstGeom prst="rect">
             <a:avLst/>
@@ -2786,7 +2786,7 @@
               <a:buChar char="•"/>
             </a:pPr>
             <a:r>
-              <a:rPr lang="en-US" sz="1400" dirty="0">
+              <a:rPr lang="en-US" sz="1350" dirty="0">
                 <a:solidFill>
                   <a:srgbClr val="3B4A7A"/>
                 </a:solidFill>
@@ -2794,9 +2794,9 @@
                 <a:ea typeface="Calibri" pitchFamily="34" charset="-122"/>
                 <a:cs typeface="Calibri" pitchFamily="34" charset="-120"/>
               </a:rPr>
-              <a:t>Reversing the source improves both BLEU and perplexity by a clear margin, under an otherwise identical setup.</a:t>
-            </a:r>
-            <a:endParaRPr lang="en-US" sz="1400" dirty="0"/>
+              <a:t>Reversal gains +2.71 BLEU and cuts test perplexity 25% (paper: +4.42, 19%) with nothing else changed.</a:t>
+            </a:r>
+            <a:endParaRPr lang="en-US" sz="1350" dirty="0"/>
           </a:p>
           <a:p>
             <a:pPr marL="342900" indent="-342900">
@@ -2807,7 +2807,7 @@
               <a:buChar char="•"/>
             </a:pPr>
             <a:r>
-              <a:rPr lang="en-US" sz="1400" dirty="0">
+              <a:rPr lang="en-US" sz="1350" dirty="0">
                 <a:solidFill>
                   <a:srgbClr val="3B4A7A"/>
                 </a:solidFill>
@@ -2815,9 +2815,9 @@
                 <a:ea typeface="Calibri" pitchFamily="34" charset="-122"/>
                 <a:cs typeface="Calibri" pitchFamily="34" charset="-120"/>
               </a:rPr>
-              <a:t>A beam of 2 captures most of the benefit of a beam of 12.</a:t>
-            </a:r>
-            <a:endParaRPr lang="en-US" sz="1400" dirty="0"/>
+              <a:t>The reversed model leads at every epoch and in every sentence-length bucket.</a:t>
+            </a:r>
+            <a:endParaRPr lang="en-US" sz="1350" dirty="0"/>
           </a:p>
           <a:p>
             <a:pPr marL="342900" indent="-342900">
@@ -2828,7 +2828,7 @@
               <a:buChar char="•"/>
             </a:pPr>
             <a:r>
-              <a:rPr lang="en-US" sz="1400" dirty="0">
+              <a:rPr lang="en-US" sz="1350" dirty="0">
                 <a:solidFill>
                   <a:srgbClr val="3B4A7A"/>
                 </a:solidFill>
@@ -2836,9 +2836,9 @@
                 <a:ea typeface="Calibri" pitchFamily="34" charset="-122"/>
                 <a:cs typeface="Calibri" pitchFamily="34" charset="-120"/>
               </a:rPr>
-              <a:t>The ordering of Table 1 rows 3 and 4 holds at our scale.</a:t>
-            </a:r>
-            <a:endParaRPr lang="en-US" sz="1400" dirty="0"/>
+              <a:t>Ensembling helps: 3 reversed seeds add +2.7 BLEU on Multi30k.</a:t>
+            </a:r>
+            <a:endParaRPr lang="en-US" sz="1350" dirty="0"/>
           </a:p>
         </p:txBody>
       </p:sp>
@@ -2851,11 +2851,11 @@
         <p:spPr>
           <a:xfrm>
             <a:off x="6400800" y="1600200"/>
-            <a:ext cx="5212080" cy="3566160"/>
+            <a:ext cx="5212080" cy="2788920"/>
           </a:xfrm>
           <a:prstGeom prst="roundRect">
             <a:avLst>
-              <a:gd name="adj" fmla="val 2308"/>
+              <a:gd name="adj" fmla="val 2951"/>
             </a:avLst>
           </a:prstGeom>
           <a:solidFill>
@@ -2902,7 +2902,7 @@
                 <a:ea typeface="Calibri" pitchFamily="34" charset="-122"/>
                 <a:cs typeface="Calibri" pitchFamily="34" charset="-120"/>
               </a:rPr>
-              <a:t>Not attempted</a:t>
+              <a:t>Did not reproduce</a:t>
             </a:r>
             <a:endParaRPr lang="en-US" sz="1600" dirty="0"/>
           </a:p>
@@ -2917,7 +2917,7 @@
         <p:spPr>
           <a:xfrm>
             <a:off x="6629400" y="2240280"/>
-            <a:ext cx="4754880" cy="2743200"/>
+            <a:ext cx="4754880" cy="2011680"/>
           </a:xfrm>
           <a:prstGeom prst="rect">
             <a:avLst/>
@@ -2937,7 +2937,7 @@
               <a:buChar char="•"/>
             </a:pPr>
             <a:r>
-              <a:rPr lang="en-US" sz="1400" dirty="0">
+              <a:rPr lang="en-US" sz="1350" dirty="0">
                 <a:solidFill>
                   <a:srgbClr val="3B4A7A"/>
                 </a:solidFill>
@@ -2945,9 +2945,9 @@
                 <a:ea typeface="Calibri" pitchFamily="34" charset="-122"/>
                 <a:cs typeface="Calibri" pitchFamily="34" charset="-120"/>
               </a:rPr>
-              <a:t>Absolute BLEU anywhere near 26–31.</a:t>
-            </a:r>
-            <a:endParaRPr lang="en-US" sz="1400" dirty="0"/>
+              <a:t>Monotone gains from a wider beam: BLEU peaks at beam 2, and length normalisation makes beam 12 worse.</a:t>
+            </a:r>
+            <a:endParaRPr lang="en-US" sz="1350" dirty="0"/>
           </a:p>
           <a:p>
             <a:pPr marL="342900" indent="-342900">
@@ -2958,7 +2958,7 @@
               <a:buChar char="•"/>
             </a:pPr>
             <a:r>
-              <a:rPr lang="en-US" sz="1400" dirty="0">
+              <a:rPr lang="en-US" sz="1350" dirty="0">
                 <a:solidFill>
                   <a:srgbClr val="3B4A7A"/>
                 </a:solidFill>
@@ -2966,9 +2966,9 @@
                 <a:ea typeface="Calibri" pitchFamily="34" charset="-122"/>
                 <a:cs typeface="Calibri" pitchFamily="34" charset="-120"/>
               </a:rPr>
-              <a:t>The 5-model ensemble rows of Table 1.</a:t>
-            </a:r>
-            <a:endParaRPr lang="en-US" sz="1400" dirty="0"/>
+              <a:t>Robustness on long sentences: both models degrade past 40 source tokens.</a:t>
+            </a:r>
+            <a:endParaRPr lang="en-US" sz="1350" dirty="0"/>
           </a:p>
           <a:p>
             <a:pPr marL="342900" indent="-342900">
@@ -2979,7 +2979,7 @@
               <a:buChar char="•"/>
             </a:pPr>
             <a:r>
-              <a:rPr lang="en-US" sz="1400" dirty="0">
+              <a:rPr lang="en-US" sz="1350" dirty="0">
                 <a:solidFill>
                   <a:srgbClr val="3B4A7A"/>
                 </a:solidFill>
@@ -2987,9 +2987,9 @@
                 <a:ea typeface="Calibri" pitchFamily="34" charset="-122"/>
                 <a:cs typeface="Calibri" pitchFamily="34" charset="-120"/>
               </a:rPr>
-              <a:t>The 1000-best SMT rescoring of Table 2.</a:t>
-            </a:r>
-            <a:endParaRPr lang="en-US" sz="1400" dirty="0"/>
+              <a:t>Absolute BLEU near 26–31 — 24× less data, and ~16% of output tokens are &lt;unk&gt;.</a:t>
+            </a:r>
+            <a:endParaRPr lang="en-US" sz="1350" dirty="0"/>
           </a:p>
         </p:txBody>
       </p:sp>
@@ -3001,7 +3001,7 @@
         </p:nvSpPr>
         <p:spPr>
           <a:xfrm>
-            <a:off x="548640" y="5349240"/>
+            <a:off x="548640" y="4663440"/>
             <a:ext cx="11064240" cy="548640"/>
           </a:xfrm>
           <a:prstGeom prst="rect">
@@ -3018,7 +3018,7 @@
               <a:buNone/>
             </a:pPr>
             <a:r>
-              <a:rPr lang="en-US" sz="1450" i="1" dirty="0">
+              <a:rPr lang="en-US" sz="1400" i="1" dirty="0">
                 <a:solidFill>
                   <a:srgbClr val="3B4A7A"/>
                 </a:solidFill>
@@ -3026,9 +3026,9 @@
                 <a:ea typeface="Calibri" pitchFamily="34" charset="-122"/>
                 <a:cs typeface="Calibri" pitchFamily="34" charset="-120"/>
               </a:rPr>
-              <a:t>These need the paper's data and compute. We say so, rather than presenting a smaller number as if it were comparable.</a:t>
-            </a:r>
-            <a:endParaRPr lang="en-US" sz="1450" dirty="0"/>
+              <a:t>Not attempted: the 5-model ensemble rows on WMT and Table 2's rescoring. We report the misses rather than hide them.</a:t>
+            </a:r>
+            <a:endParaRPr lang="en-US" sz="1400" dirty="0"/>
           </a:p>
         </p:txBody>
       </p:sp>
@@ -8487,7 +8487,7 @@
         <p:spPr>
           <a:xfrm>
             <a:off x="548640" y="4160520"/>
-            <a:ext cx="3566160" cy="1481328"/>
+            <a:ext cx="3502152" cy="1481328"/>
           </a:xfrm>
           <a:prstGeom prst="roundRect">
             <a:avLst>
@@ -8514,7 +8514,7 @@
         <p:spPr>
           <a:xfrm>
             <a:off x="548640" y="4306824"/>
-            <a:ext cx="3566160" cy="786384"/>
+            <a:ext cx="3502152" cy="786384"/>
           </a:xfrm>
           <a:prstGeom prst="rect">
             <a:avLst/>
@@ -8553,7 +8553,7 @@
         <p:spPr>
           <a:xfrm>
             <a:off x="658368" y="5102352"/>
-            <a:ext cx="3346704" cy="457200"/>
+            <a:ext cx="3282696" cy="457200"/>
           </a:xfrm>
           <a:prstGeom prst="rect">
             <a:avLst/>
@@ -8608,8 +8608,8 @@
         </p:nvSpPr>
         <p:spPr>
           <a:xfrm>
-            <a:off x="4434840" y="4160520"/>
-            <a:ext cx="3566160" cy="1481328"/>
+            <a:off x="4325112" y="4160520"/>
+            <a:ext cx="3502152" cy="1481328"/>
           </a:xfrm>
           <a:prstGeom prst="roundRect">
             <a:avLst>
@@ -8635,8 +8635,8 @@
         </p:nvSpPr>
         <p:spPr>
           <a:xfrm>
-            <a:off x="4434840" y="4306824"/>
-            <a:ext cx="3566160" cy="786384"/>
+            <a:off x="4325112" y="4306824"/>
+            <a:ext cx="3502152" cy="786384"/>
           </a:xfrm>
           <a:prstGeom prst="rect">
             <a:avLst/>
@@ -8674,8 +8674,8 @@
         </p:nvSpPr>
         <p:spPr>
           <a:xfrm>
-            <a:off x="4544568" y="5102352"/>
-            <a:ext cx="3346704" cy="457200"/>
+            <a:off x="4434840" y="5102352"/>
+            <a:ext cx="3282696" cy="457200"/>
           </a:xfrm>
           <a:prstGeom prst="rect">
             <a:avLst/>
@@ -8730,8 +8730,8 @@
         </p:nvSpPr>
         <p:spPr>
           <a:xfrm>
-            <a:off x="8321040" y="4160520"/>
-            <a:ext cx="3566160" cy="1481328"/>
+            <a:off x="8110728" y="4160520"/>
+            <a:ext cx="3502152" cy="1481328"/>
           </a:xfrm>
           <a:prstGeom prst="roundRect">
             <a:avLst>
@@ -8757,8 +8757,8 @@
         </p:nvSpPr>
         <p:spPr>
           <a:xfrm>
-            <a:off x="8321040" y="4306824"/>
-            <a:ext cx="3566160" cy="786384"/>
+            <a:off x="8110728" y="4306824"/>
+            <a:ext cx="3502152" cy="786384"/>
           </a:xfrm>
           <a:prstGeom prst="rect">
             <a:avLst/>
@@ -8796,8 +8796,8 @@
         </p:nvSpPr>
         <p:spPr>
           <a:xfrm>
-            <a:off x="8430768" y="5102352"/>
-            <a:ext cx="3346704" cy="457200"/>
+            <a:off x="8220456" y="5102352"/>
+            <a:ext cx="3282696" cy="457200"/>
           </a:xfrm>
           <a:prstGeom prst="rect">
             <a:avLst/>
@@ -9042,8 +9042,8 @@
         </p:nvSpPr>
         <p:spPr>
           <a:xfrm>
-            <a:off x="548640" y="4956048"/>
-            <a:ext cx="11064240" cy="685800"/>
+            <a:off x="548640" y="4919472"/>
+            <a:ext cx="11064240" cy="914400"/>
           </a:xfrm>
           <a:prstGeom prst="rect">
             <a:avLst/>
@@ -9059,7 +9059,7 @@
               <a:buNone/>
             </a:pPr>
             <a:r>
-              <a:rPr lang="en-US" sz="1400" dirty="0">
+              <a:rPr lang="en-US" sz="1350" dirty="0">
                 <a:solidFill>
                   <a:srgbClr val="3B4A7A"/>
                 </a:solidFill>
@@ -9067,9 +9067,9 @@
                 <a:ea typeface="Calibri" pitchFamily="34" charset="-122"/>
                 <a:cs typeface="Calibri" pitchFamily="34" charset="-120"/>
               </a:rPr>
-              <a:t>Beam 2 recovers 216% of the gain from beam 1 to beam 12 — reproducing the paper's observation that "a beam of size 2 provides most of the benefits of beam search".</a:t>
-            </a:r>
-            <a:endParaRPr lang="en-US" sz="1400" dirty="0"/>
+              <a:t>Beam: 6.41 → 6.82 → 6.60 BLEU. It peaks at beam 2, so the paper's monotone beam gain does NOT reproduce — a wider beam finds likelier but worse translations. Length: reversed leads in every bucket, but falls from 9.5 to 3.7 BLEU on the longest sentences.</a:t>
+            </a:r>
+            <a:endParaRPr lang="en-US" sz="1350" dirty="0"/>
           </a:p>
         </p:txBody>
       </p:sp>
